--- a/Readme/IntroToModac.pptx
+++ b/Readme/IntroToModac.pptx
@@ -19,9 +19,14 @@
     <p:sldId id="271" r:id="rId13"/>
     <p:sldId id="272" r:id="rId14"/>
     <p:sldId id="273" r:id="rId15"/>
-    <p:sldId id="274" r:id="rId16"/>
-    <p:sldId id="261" r:id="rId17"/>
-    <p:sldId id="262" r:id="rId18"/>
+    <p:sldId id="276" r:id="rId16"/>
+    <p:sldId id="277" r:id="rId17"/>
+    <p:sldId id="278" r:id="rId18"/>
+    <p:sldId id="279" r:id="rId19"/>
+    <p:sldId id="280" r:id="rId20"/>
+    <p:sldId id="281" r:id="rId21"/>
+    <p:sldId id="282" r:id="rId22"/>
+    <p:sldId id="262" r:id="rId23"/>
   </p:sldIdLst>
   <p:sldSz cx="12192000" cy="6858000"/>
   <p:notesSz cx="6858000" cy="9144000"/>
@@ -275,7 +280,7 @@
           <a:p>
             <a:fld id="{FA812CF8-5571-2F43-B531-95039EEE283D}" type="datetimeFigureOut">
               <a:rPr lang="en-US" smtClean="0"/>
-              <a:t>4/26/23</a:t>
+              <a:t>10/1/23</a:t>
             </a:fld>
             <a:endParaRPr lang="en-US"/>
           </a:p>
@@ -473,7 +478,7 @@
           <a:p>
             <a:fld id="{FA812CF8-5571-2F43-B531-95039EEE283D}" type="datetimeFigureOut">
               <a:rPr lang="en-US" smtClean="0"/>
-              <a:t>4/26/23</a:t>
+              <a:t>10/1/23</a:t>
             </a:fld>
             <a:endParaRPr lang="en-US"/>
           </a:p>
@@ -681,7 +686,7 @@
           <a:p>
             <a:fld id="{FA812CF8-5571-2F43-B531-95039EEE283D}" type="datetimeFigureOut">
               <a:rPr lang="en-US" smtClean="0"/>
-              <a:t>4/26/23</a:t>
+              <a:t>10/1/23</a:t>
             </a:fld>
             <a:endParaRPr lang="en-US"/>
           </a:p>
@@ -879,7 +884,7 @@
           <a:p>
             <a:fld id="{FA812CF8-5571-2F43-B531-95039EEE283D}" type="datetimeFigureOut">
               <a:rPr lang="en-US" smtClean="0"/>
-              <a:t>4/26/23</a:t>
+              <a:t>10/1/23</a:t>
             </a:fld>
             <a:endParaRPr lang="en-US"/>
           </a:p>
@@ -1154,7 +1159,7 @@
           <a:p>
             <a:fld id="{FA812CF8-5571-2F43-B531-95039EEE283D}" type="datetimeFigureOut">
               <a:rPr lang="en-US" smtClean="0"/>
-              <a:t>4/26/23</a:t>
+              <a:t>10/1/23</a:t>
             </a:fld>
             <a:endParaRPr lang="en-US"/>
           </a:p>
@@ -1419,7 +1424,7 @@
           <a:p>
             <a:fld id="{FA812CF8-5571-2F43-B531-95039EEE283D}" type="datetimeFigureOut">
               <a:rPr lang="en-US" smtClean="0"/>
-              <a:t>4/26/23</a:t>
+              <a:t>10/1/23</a:t>
             </a:fld>
             <a:endParaRPr lang="en-US"/>
           </a:p>
@@ -1831,7 +1836,7 @@
           <a:p>
             <a:fld id="{FA812CF8-5571-2F43-B531-95039EEE283D}" type="datetimeFigureOut">
               <a:rPr lang="en-US" smtClean="0"/>
-              <a:t>4/26/23</a:t>
+              <a:t>10/1/23</a:t>
             </a:fld>
             <a:endParaRPr lang="en-US"/>
           </a:p>
@@ -1972,7 +1977,7 @@
           <a:p>
             <a:fld id="{FA812CF8-5571-2F43-B531-95039EEE283D}" type="datetimeFigureOut">
               <a:rPr lang="en-US" smtClean="0"/>
-              <a:t>4/26/23</a:t>
+              <a:t>10/1/23</a:t>
             </a:fld>
             <a:endParaRPr lang="en-US"/>
           </a:p>
@@ -2085,7 +2090,7 @@
           <a:p>
             <a:fld id="{FA812CF8-5571-2F43-B531-95039EEE283D}" type="datetimeFigureOut">
               <a:rPr lang="en-US" smtClean="0"/>
-              <a:t>4/26/23</a:t>
+              <a:t>10/1/23</a:t>
             </a:fld>
             <a:endParaRPr lang="en-US"/>
           </a:p>
@@ -2396,7 +2401,7 @@
           <a:p>
             <a:fld id="{FA812CF8-5571-2F43-B531-95039EEE283D}" type="datetimeFigureOut">
               <a:rPr lang="en-US" smtClean="0"/>
-              <a:t>4/26/23</a:t>
+              <a:t>10/1/23</a:t>
             </a:fld>
             <a:endParaRPr lang="en-US"/>
           </a:p>
@@ -2684,7 +2689,7 @@
           <a:p>
             <a:fld id="{FA812CF8-5571-2F43-B531-95039EEE283D}" type="datetimeFigureOut">
               <a:rPr lang="en-US" smtClean="0"/>
-              <a:t>4/26/23</a:t>
+              <a:t>10/1/23</a:t>
             </a:fld>
             <a:endParaRPr lang="en-US"/>
           </a:p>
@@ -2925,7 +2930,7 @@
           <a:p>
             <a:fld id="{FA812CF8-5571-2F43-B531-95039EEE283D}" type="datetimeFigureOut">
               <a:rPr lang="en-US" smtClean="0"/>
-              <a:t>4/26/23</a:t>
+              <a:t>10/1/23</a:t>
             </a:fld>
             <a:endParaRPr lang="en-US"/>
           </a:p>
@@ -3712,220 +3717,12 @@
           </a:p>
         </p:txBody>
       </p:sp>
-      <p:sp>
-        <p:nvSpPr>
-          <p:cNvPr id="3" name="TextBox 2">
-            <a:extLst>
-              <a:ext uri="{FF2B5EF4-FFF2-40B4-BE49-F238E27FC236}">
-                <a16:creationId xmlns:a16="http://schemas.microsoft.com/office/drawing/2014/main" id="{7D10777D-6F39-622B-2D04-39C9328E38AB}"/>
-              </a:ext>
-            </a:extLst>
-          </p:cNvPr>
-          <p:cNvSpPr txBox="1"/>
-          <p:nvPr/>
-        </p:nvSpPr>
-        <p:spPr>
-          <a:xfrm>
-            <a:off x="5564910" y="968829"/>
-            <a:ext cx="6627089" cy="5909310"/>
-          </a:xfrm>
-          <a:prstGeom prst="rect">
-            <a:avLst/>
-          </a:prstGeom>
-          <a:noFill/>
-        </p:spPr>
-        <p:txBody>
-          <a:bodyPr wrap="square" rtlCol="0">
-            <a:spAutoFit/>
-          </a:bodyPr>
-          <a:lstStyle/>
-          <a:p>
-            <a:pPr marL="285750" indent="-285750">
-              <a:buFont typeface="Arial" panose="020B0604020202020204" pitchFamily="34" charset="0"/>
-              <a:buChar char="•"/>
-            </a:pPr>
-            <a:r>
-              <a:rPr lang="en-US" b="1" dirty="0" err="1"/>
-              <a:t>padj_method</a:t>
-            </a:r>
-            <a:r>
-              <a:rPr lang="en-US" dirty="0"/>
-              <a:t>: “</a:t>
-            </a:r>
-            <a:r>
-              <a:rPr lang="en-US" dirty="0" err="1"/>
-              <a:t>pval</a:t>
-            </a:r>
-            <a:r>
-              <a:rPr lang="en-US" dirty="0"/>
-              <a:t>” or “</a:t>
-            </a:r>
-            <a:r>
-              <a:rPr lang="en-US" dirty="0" err="1"/>
-              <a:t>fdr</a:t>
-            </a:r>
-            <a:r>
-              <a:rPr lang="en-US" dirty="0"/>
-              <a:t>”. Use p-value or FDR for generating filtered heatmaps and signature files?</a:t>
-            </a:r>
-          </a:p>
-          <a:p>
-            <a:pPr marL="285750" indent="-285750">
-              <a:buFont typeface="Arial" panose="020B0604020202020204" pitchFamily="34" charset="0"/>
-              <a:buChar char="•"/>
-            </a:pPr>
-            <a:r>
-              <a:rPr lang="en-US" b="1" dirty="0" err="1"/>
-              <a:t>padj_cutoff</a:t>
-            </a:r>
-            <a:r>
-              <a:rPr lang="en-US" dirty="0"/>
-              <a:t>: p-value or FDR threshold for generating filtered heatmaps and signature files.</a:t>
-            </a:r>
-          </a:p>
-          <a:p>
-            <a:pPr marL="285750" indent="-285750">
-              <a:buFont typeface="Arial" panose="020B0604020202020204" pitchFamily="34" charset="0"/>
-              <a:buChar char="•"/>
-            </a:pPr>
-            <a:r>
-              <a:rPr lang="en-US" b="1" dirty="0" err="1"/>
-              <a:t>fc_type</a:t>
-            </a:r>
-            <a:r>
-              <a:rPr lang="en-US" dirty="0"/>
-              <a:t>: “linear” or “log2”. Calculate linear fold change or log2 fold change?</a:t>
-            </a:r>
-          </a:p>
-          <a:p>
-            <a:pPr marL="285750" indent="-285750">
-              <a:buFont typeface="Arial" panose="020B0604020202020204" pitchFamily="34" charset="0"/>
-              <a:buChar char="•"/>
-            </a:pPr>
-            <a:r>
-              <a:rPr lang="en-US" b="1" dirty="0" err="1"/>
-              <a:t>linear_fc_cutoff</a:t>
-            </a:r>
-            <a:r>
-              <a:rPr lang="en-US" dirty="0"/>
-              <a:t>: Fold change threshold for generating signature files.</a:t>
-            </a:r>
-          </a:p>
-          <a:p>
-            <a:pPr marL="285750" indent="-285750">
-              <a:buFont typeface="Arial" panose="020B0604020202020204" pitchFamily="34" charset="0"/>
-              <a:buChar char="•"/>
-            </a:pPr>
-            <a:r>
-              <a:rPr lang="en-US" b="1" dirty="0" err="1"/>
-              <a:t>QC_row</a:t>
-            </a:r>
-            <a:r>
-              <a:rPr lang="en-US" dirty="0"/>
-              <a:t>: row index for the first QC sample.</a:t>
-            </a:r>
-          </a:p>
-          <a:p>
-            <a:pPr marL="285750" indent="-285750">
-              <a:buFont typeface="Arial" panose="020B0604020202020204" pitchFamily="34" charset="0"/>
-              <a:buChar char="•"/>
-            </a:pPr>
-            <a:r>
-              <a:rPr lang="en-US" b="1" dirty="0" err="1"/>
-              <a:t>cv_cutoff_internal_standard</a:t>
-            </a:r>
-            <a:r>
-              <a:rPr lang="en-US" dirty="0"/>
-              <a:t>: Coefficient of variation (CV) threshold for internal standard (ISTD). Only ISTDs with CV lower than this threshold will be considered for normalization.</a:t>
-            </a:r>
-          </a:p>
-          <a:p>
-            <a:pPr marL="285750" indent="-285750">
-              <a:buFont typeface="Arial" panose="020B0604020202020204" pitchFamily="34" charset="0"/>
-              <a:buChar char="•"/>
-            </a:pPr>
-            <a:r>
-              <a:rPr lang="en-US" b="1" dirty="0"/>
-              <a:t>normalization</a:t>
-            </a:r>
-            <a:r>
-              <a:rPr lang="en-US" dirty="0"/>
-              <a:t>: “</a:t>
-            </a:r>
-            <a:r>
-              <a:rPr lang="en-US" dirty="0" err="1"/>
-              <a:t>istd</a:t>
-            </a:r>
-            <a:r>
-              <a:rPr lang="en-US" dirty="0"/>
-              <a:t>”, “</a:t>
-            </a:r>
-            <a:r>
-              <a:rPr lang="en-US" dirty="0" err="1"/>
-              <a:t>iqr</a:t>
-            </a:r>
-            <a:r>
-              <a:rPr lang="en-US" dirty="0"/>
-              <a:t>”, or “none”. Type of normalization to be performed – internal standard, interquartile range, or none?</a:t>
-            </a:r>
-          </a:p>
-          <a:p>
-            <a:pPr marL="285750" indent="-285750">
-              <a:buFont typeface="Arial" panose="020B0604020202020204" pitchFamily="34" charset="0"/>
-              <a:buChar char="•"/>
-            </a:pPr>
-            <a:r>
-              <a:rPr lang="en-US" b="1" dirty="0"/>
-              <a:t>log2transform</a:t>
-            </a:r>
-            <a:r>
-              <a:rPr lang="en-US" dirty="0"/>
-              <a:t>: Apply log2 transformation?</a:t>
-            </a:r>
-          </a:p>
-          <a:p>
-            <a:pPr marL="285750" indent="-285750">
-              <a:buFont typeface="Arial" panose="020B0604020202020204" pitchFamily="34" charset="0"/>
-              <a:buChar char="•"/>
-            </a:pPr>
-            <a:r>
-              <a:rPr lang="en-US" b="1" dirty="0"/>
-              <a:t>tab</a:t>
-            </a:r>
-            <a:r>
-              <a:rPr lang="en-US" dirty="0"/>
-              <a:t>: For ISTD normalization, write down names of all the methods below this. For any other normalization, leave blank.</a:t>
-            </a:r>
-          </a:p>
-          <a:p>
-            <a:pPr marL="285750" indent="-285750">
-              <a:buFont typeface="Arial" panose="020B0604020202020204" pitchFamily="34" charset="0"/>
-              <a:buChar char="•"/>
-            </a:pPr>
-            <a:r>
-              <a:rPr lang="en-US" b="1" dirty="0" err="1"/>
-              <a:t>ISTD_column</a:t>
-            </a:r>
-            <a:r>
-              <a:rPr lang="en-US" dirty="0"/>
-              <a:t>: For ISTD normalization, write down index of the first (or only) internal standard methods below this for all the methods. For any other normalization, leave blank.</a:t>
-            </a:r>
-          </a:p>
-          <a:p>
-            <a:pPr marL="285750" indent="-285750">
-              <a:buFont typeface="Arial" panose="020B0604020202020204" pitchFamily="34" charset="0"/>
-              <a:buChar char="•"/>
-            </a:pPr>
-            <a:endParaRPr lang="en-US" b="1" u="sng" dirty="0"/>
-          </a:p>
-        </p:txBody>
-      </p:sp>
       <p:pic>
         <p:nvPicPr>
-          <p:cNvPr id="6" name="Picture 5">
-            <a:extLst>
-              <a:ext uri="{FF2B5EF4-FFF2-40B4-BE49-F238E27FC236}">
-                <a16:creationId xmlns:a16="http://schemas.microsoft.com/office/drawing/2014/main" id="{D4982116-5851-D9CD-E4D9-1AB1A87CDBE0}"/>
+          <p:cNvPr id="5" name="Picture 4">
+            <a:extLst>
+              <a:ext uri="{FF2B5EF4-FFF2-40B4-BE49-F238E27FC236}">
+                <a16:creationId xmlns:a16="http://schemas.microsoft.com/office/drawing/2014/main" id="{171B2966-A8FF-7D67-943D-6F08604790FB}"/>
               </a:ext>
             </a:extLst>
           </p:cNvPr>
@@ -3942,14 +3739,230 @@
         </p:blipFill>
         <p:spPr>
           <a:xfrm>
-            <a:off x="0" y="1456942"/>
-            <a:ext cx="4093029" cy="4933083"/>
+            <a:off x="0" y="968829"/>
+            <a:ext cx="5564911" cy="5500947"/>
           </a:xfrm>
           <a:prstGeom prst="rect">
             <a:avLst/>
           </a:prstGeom>
         </p:spPr>
       </p:pic>
+      <p:sp>
+        <p:nvSpPr>
+          <p:cNvPr id="7" name="TextBox 6">
+            <a:extLst>
+              <a:ext uri="{FF2B5EF4-FFF2-40B4-BE49-F238E27FC236}">
+                <a16:creationId xmlns:a16="http://schemas.microsoft.com/office/drawing/2014/main" id="{DA689E04-D282-3827-501B-D45D995F777B}"/>
+              </a:ext>
+            </a:extLst>
+          </p:cNvPr>
+          <p:cNvSpPr txBox="1"/>
+          <p:nvPr/>
+        </p:nvSpPr>
+        <p:spPr>
+          <a:xfrm>
+            <a:off x="5564911" y="1006839"/>
+            <a:ext cx="6627089" cy="5509200"/>
+          </a:xfrm>
+          <a:prstGeom prst="rect">
+            <a:avLst/>
+          </a:prstGeom>
+          <a:noFill/>
+        </p:spPr>
+        <p:txBody>
+          <a:bodyPr wrap="square" rtlCol="0">
+            <a:spAutoFit/>
+          </a:bodyPr>
+          <a:lstStyle/>
+          <a:p>
+            <a:pPr marL="285750" indent="-285750">
+              <a:buFont typeface="Arial" panose="020B0604020202020204" pitchFamily="34" charset="0"/>
+              <a:buChar char="•"/>
+            </a:pPr>
+            <a:r>
+              <a:rPr lang="en-US" sz="1600" b="1" dirty="0" err="1"/>
+              <a:t>padj_method</a:t>
+            </a:r>
+            <a:r>
+              <a:rPr lang="en-US" sz="1600" dirty="0"/>
+              <a:t>: “</a:t>
+            </a:r>
+            <a:r>
+              <a:rPr lang="en-US" sz="1600" dirty="0" err="1"/>
+              <a:t>pval</a:t>
+            </a:r>
+            <a:r>
+              <a:rPr lang="en-US" sz="1600" dirty="0"/>
+              <a:t>” or “</a:t>
+            </a:r>
+            <a:r>
+              <a:rPr lang="en-US" sz="1600" dirty="0" err="1"/>
+              <a:t>fdr</a:t>
+            </a:r>
+            <a:r>
+              <a:rPr lang="en-US" sz="1600" dirty="0"/>
+              <a:t>”. Use p-value or FDR for generating filtered heatmaps and signature files?</a:t>
+            </a:r>
+          </a:p>
+          <a:p>
+            <a:pPr marL="285750" indent="-285750">
+              <a:buFont typeface="Arial" panose="020B0604020202020204" pitchFamily="34" charset="0"/>
+              <a:buChar char="•"/>
+            </a:pPr>
+            <a:r>
+              <a:rPr lang="en-US" sz="1600" b="1" dirty="0" err="1"/>
+              <a:t>padj_cutoff</a:t>
+            </a:r>
+            <a:r>
+              <a:rPr lang="en-US" sz="1600" dirty="0"/>
+              <a:t>: p-value or FDR threshold for generating filtered heatmaps and signature files.</a:t>
+            </a:r>
+          </a:p>
+          <a:p>
+            <a:pPr marL="285750" indent="-285750">
+              <a:buFont typeface="Arial" panose="020B0604020202020204" pitchFamily="34" charset="0"/>
+              <a:buChar char="•"/>
+            </a:pPr>
+            <a:r>
+              <a:rPr lang="en-US" sz="1600" b="1" dirty="0"/>
+              <a:t>compute_log2fc</a:t>
+            </a:r>
+            <a:r>
+              <a:rPr lang="en-US" sz="1600" dirty="0"/>
+              <a:t>: TRUE or FALSE. Calculate log2 and linear fold change or only linear fold change?</a:t>
+            </a:r>
+          </a:p>
+          <a:p>
+            <a:pPr marL="285750" indent="-285750">
+              <a:buFont typeface="Arial" panose="020B0604020202020204" pitchFamily="34" charset="0"/>
+              <a:buChar char="•"/>
+            </a:pPr>
+            <a:r>
+              <a:rPr lang="en-US" sz="1600" b="1" dirty="0" err="1"/>
+              <a:t>linear_fc_cutoff</a:t>
+            </a:r>
+            <a:r>
+              <a:rPr lang="en-US" sz="1600" dirty="0"/>
+              <a:t>: Fold change threshold for generating signature files.</a:t>
+            </a:r>
+          </a:p>
+          <a:p>
+            <a:pPr marL="285750" indent="-285750">
+              <a:buFont typeface="Arial" panose="020B0604020202020204" pitchFamily="34" charset="0"/>
+              <a:buChar char="•"/>
+            </a:pPr>
+            <a:r>
+              <a:rPr lang="en-US" sz="1600" b="1" dirty="0" err="1"/>
+              <a:t>QC_row</a:t>
+            </a:r>
+            <a:r>
+              <a:rPr lang="en-US" sz="1600" dirty="0"/>
+              <a:t>: row index for the first QC sample.</a:t>
+            </a:r>
+          </a:p>
+          <a:p>
+            <a:pPr marL="285750" indent="-285750">
+              <a:buFont typeface="Arial" panose="020B0604020202020204" pitchFamily="34" charset="0"/>
+              <a:buChar char="•"/>
+            </a:pPr>
+            <a:r>
+              <a:rPr lang="en-US" sz="1600" b="1" dirty="0" err="1"/>
+              <a:t>cv_cutoff_internal_standard</a:t>
+            </a:r>
+            <a:r>
+              <a:rPr lang="en-US" sz="1600" dirty="0"/>
+              <a:t>: Coefficient of variation (CV) threshold for internal standard (ISTD). Only ISTDs with CV lower than this threshold will be considered for normalization.</a:t>
+            </a:r>
+          </a:p>
+          <a:p>
+            <a:pPr marL="285750" indent="-285750">
+              <a:buFont typeface="Arial" panose="020B0604020202020204" pitchFamily="34" charset="0"/>
+              <a:buChar char="•"/>
+            </a:pPr>
+            <a:r>
+              <a:rPr lang="en-US" sz="1600" b="1" dirty="0"/>
+              <a:t>normalization</a:t>
+            </a:r>
+            <a:r>
+              <a:rPr lang="en-US" sz="1600" dirty="0"/>
+              <a:t>: “</a:t>
+            </a:r>
+            <a:r>
+              <a:rPr lang="en-US" sz="1600" dirty="0" err="1"/>
+              <a:t>istd</a:t>
+            </a:r>
+            <a:r>
+              <a:rPr lang="en-US" sz="1600" dirty="0"/>
+              <a:t>”, “</a:t>
+            </a:r>
+            <a:r>
+              <a:rPr lang="en-US" sz="1600" dirty="0" err="1"/>
+              <a:t>iqr</a:t>
+            </a:r>
+            <a:r>
+              <a:rPr lang="en-US" sz="1600" dirty="0"/>
+              <a:t>”, or “none”. Type of normalization to be performed – internal standard, interquartile range, or none?</a:t>
+            </a:r>
+          </a:p>
+          <a:p>
+            <a:pPr marL="285750" indent="-285750">
+              <a:buFont typeface="Arial" panose="020B0604020202020204" pitchFamily="34" charset="0"/>
+              <a:buChar char="•"/>
+            </a:pPr>
+            <a:r>
+              <a:rPr lang="en-US" sz="1600" b="1" dirty="0" err="1"/>
+              <a:t>input_data_space</a:t>
+            </a:r>
+            <a:r>
+              <a:rPr lang="en-US" sz="1600" dirty="0"/>
+              <a:t>: “linear” or “log2”. Input data is in linear space or log2 space?</a:t>
+            </a:r>
+          </a:p>
+          <a:p>
+            <a:pPr marL="285750" indent="-285750">
+              <a:buFont typeface="Arial" panose="020B0604020202020204" pitchFamily="34" charset="0"/>
+              <a:buChar char="•"/>
+            </a:pPr>
+            <a:r>
+              <a:rPr lang="en-US" sz="1600" b="1" dirty="0" err="1"/>
+              <a:t>differential_analysis_space</a:t>
+            </a:r>
+            <a:r>
+              <a:rPr lang="en-US" sz="1600" dirty="0"/>
+              <a:t>: “linear” or “log2”. For differential analysis, transform the data to linear or log2 space?</a:t>
+            </a:r>
+            <a:endParaRPr lang="en-US" sz="1600" b="1" dirty="0"/>
+          </a:p>
+          <a:p>
+            <a:pPr marL="285750" indent="-285750">
+              <a:buFont typeface="Arial" panose="020B0604020202020204" pitchFamily="34" charset="0"/>
+              <a:buChar char="•"/>
+            </a:pPr>
+            <a:r>
+              <a:rPr lang="en-US" sz="1600" b="1" dirty="0"/>
+              <a:t>tab</a:t>
+            </a:r>
+            <a:r>
+              <a:rPr lang="en-US" sz="1600" dirty="0"/>
+              <a:t>: For ISTD normalization, write down names of all the methods below this. For any other normalization, leave blank.</a:t>
+            </a:r>
+          </a:p>
+          <a:p>
+            <a:pPr marL="285750" indent="-285750">
+              <a:buFont typeface="Arial" panose="020B0604020202020204" pitchFamily="34" charset="0"/>
+              <a:buChar char="•"/>
+            </a:pPr>
+            <a:r>
+              <a:rPr lang="en-US" sz="1600" b="1" dirty="0" err="1"/>
+              <a:t>ISTD_column</a:t>
+            </a:r>
+            <a:r>
+              <a:rPr lang="en-US" sz="1600" dirty="0"/>
+              <a:t>: For ISTD normalization, write down index of the first (or only) internal standard methods below this for all the methods. For any other normalization, leave blank.</a:t>
+            </a:r>
+          </a:p>
+        </p:txBody>
+      </p:sp>
     </p:spTree>
     <p:extLst>
       <p:ext uri="{BB962C8B-B14F-4D97-AF65-F5344CB8AC3E}">
@@ -4241,170 +4254,12 @@
           </a:p>
         </p:txBody>
       </p:sp>
-      <p:sp>
-        <p:nvSpPr>
-          <p:cNvPr id="12" name="TextBox 11">
-            <a:extLst>
-              <a:ext uri="{FF2B5EF4-FFF2-40B4-BE49-F238E27FC236}">
-                <a16:creationId xmlns:a16="http://schemas.microsoft.com/office/drawing/2014/main" id="{0DF7F6F9-9252-948A-C4A1-795026BE8DAD}"/>
-              </a:ext>
-            </a:extLst>
-          </p:cNvPr>
-          <p:cNvSpPr txBox="1"/>
-          <p:nvPr/>
-        </p:nvSpPr>
-        <p:spPr>
-          <a:xfrm>
-            <a:off x="7108372" y="1859338"/>
-            <a:ext cx="5323112" cy="3139321"/>
-          </a:xfrm>
-          <a:prstGeom prst="rect">
-            <a:avLst/>
-          </a:prstGeom>
-          <a:noFill/>
-        </p:spPr>
-        <p:txBody>
-          <a:bodyPr wrap="square">
-            <a:spAutoFit/>
-          </a:bodyPr>
-          <a:lstStyle/>
-          <a:p>
-            <a:pPr marL="285750" indent="-285750">
-              <a:buFont typeface="Arial" panose="020B0604020202020204" pitchFamily="34" charset="0"/>
-              <a:buChar char="•"/>
-            </a:pPr>
-            <a:r>
-              <a:rPr lang="en-US" b="1" dirty="0" err="1"/>
-              <a:t>inputFile</a:t>
-            </a:r>
-            <a:r>
-              <a:rPr lang="en-US" dirty="0"/>
-              <a:t>: path to the input file.</a:t>
-            </a:r>
-            <a:endParaRPr lang="en-US" b="1" dirty="0"/>
-          </a:p>
-          <a:p>
-            <a:pPr marL="285750" indent="-285750">
-              <a:buFont typeface="Arial" panose="020B0604020202020204" pitchFamily="34" charset="0"/>
-              <a:buChar char="•"/>
-            </a:pPr>
-            <a:r>
-              <a:rPr lang="en-US" b="1" dirty="0" err="1"/>
-              <a:t>comparisonsFile</a:t>
-            </a:r>
-            <a:r>
-              <a:rPr lang="en-US" dirty="0"/>
-              <a:t>: path to the comparisons file.</a:t>
-            </a:r>
-            <a:endParaRPr lang="en-US" b="1" dirty="0"/>
-          </a:p>
-          <a:p>
-            <a:pPr marL="285750" indent="-285750">
-              <a:buFont typeface="Arial" panose="020B0604020202020204" pitchFamily="34" charset="0"/>
-              <a:buChar char="•"/>
-            </a:pPr>
-            <a:r>
-              <a:rPr lang="en-US" b="1" dirty="0"/>
-              <a:t>type</a:t>
-            </a:r>
-            <a:r>
-              <a:rPr lang="en-US" dirty="0"/>
-              <a:t>: “metabolomics”, “</a:t>
-            </a:r>
-            <a:r>
-              <a:rPr lang="en-US" dirty="0" err="1"/>
-              <a:t>rppa</a:t>
-            </a:r>
-            <a:r>
-              <a:rPr lang="en-US" dirty="0"/>
-              <a:t>”, or “none”. Use “none” for </a:t>
-            </a:r>
-            <a:r>
-              <a:rPr lang="en-US" dirty="0" err="1"/>
-              <a:t>prenormalized</a:t>
-            </a:r>
-            <a:r>
-              <a:rPr lang="en-US" dirty="0"/>
-              <a:t> data.</a:t>
-            </a:r>
-            <a:endParaRPr lang="en-US" b="1" dirty="0"/>
-          </a:p>
-          <a:p>
-            <a:pPr marL="285750" indent="-285750">
-              <a:buFont typeface="Arial" panose="020B0604020202020204" pitchFamily="34" charset="0"/>
-              <a:buChar char="•"/>
-            </a:pPr>
-            <a:r>
-              <a:rPr lang="en-US" b="1" dirty="0" err="1"/>
-              <a:t>outdir</a:t>
-            </a:r>
-            <a:r>
-              <a:rPr lang="en-US" dirty="0"/>
-              <a:t>: path to output directory.</a:t>
-            </a:r>
-            <a:endParaRPr lang="en-US" b="1" dirty="0"/>
-          </a:p>
-          <a:p>
-            <a:pPr marL="285750" indent="-285750">
-              <a:buFont typeface="Arial" panose="020B0604020202020204" pitchFamily="34" charset="0"/>
-              <a:buChar char="•"/>
-            </a:pPr>
-            <a:r>
-              <a:rPr lang="en-US" b="1" dirty="0" err="1"/>
-              <a:t>project_title</a:t>
-            </a:r>
-            <a:r>
-              <a:rPr lang="en-US" dirty="0"/>
-              <a:t>: project title to be used in the summary pptx.</a:t>
-            </a:r>
-            <a:endParaRPr lang="en-US" b="1" dirty="0"/>
-          </a:p>
-          <a:p>
-            <a:pPr marL="285750" indent="-285750">
-              <a:buFont typeface="Arial" panose="020B0604020202020204" pitchFamily="34" charset="0"/>
-              <a:buChar char="•"/>
-            </a:pPr>
-            <a:r>
-              <a:rPr lang="en-US" b="1" dirty="0" err="1"/>
-              <a:t>project_subtitle</a:t>
-            </a:r>
-            <a:r>
-              <a:rPr lang="en-US" dirty="0"/>
-              <a:t>: project subtitle to be used in the summary pptx.</a:t>
-            </a:r>
-            <a:endParaRPr lang="en-US" b="1" dirty="0"/>
-          </a:p>
-          <a:p>
-            <a:pPr marL="285750" indent="-285750">
-              <a:buFont typeface="Arial" panose="020B0604020202020204" pitchFamily="34" charset="0"/>
-              <a:buChar char="•"/>
-            </a:pPr>
-            <a:r>
-              <a:rPr lang="en-US" b="1" dirty="0" err="1"/>
-              <a:t>scriptPath</a:t>
-            </a:r>
-            <a:r>
-              <a:rPr lang="en-US" dirty="0"/>
-              <a:t>: path to R folder within the </a:t>
-            </a:r>
-            <a:r>
-              <a:rPr lang="en-US" dirty="0" err="1"/>
-              <a:t>runMODAC</a:t>
-            </a:r>
-            <a:r>
-              <a:rPr lang="en-US" dirty="0"/>
-              <a:t> folder on your system.</a:t>
-            </a:r>
-            <a:endParaRPr lang="en-US" b="1" dirty="0"/>
-          </a:p>
-        </p:txBody>
-      </p:sp>
       <p:pic>
         <p:nvPicPr>
-          <p:cNvPr id="6" name="Picture 5">
-            <a:extLst>
-              <a:ext uri="{FF2B5EF4-FFF2-40B4-BE49-F238E27FC236}">
-                <a16:creationId xmlns:a16="http://schemas.microsoft.com/office/drawing/2014/main" id="{4BE7B356-5350-C187-0625-4B30196E792C}"/>
+          <p:cNvPr id="4" name="Picture 3">
+            <a:extLst>
+              <a:ext uri="{FF2B5EF4-FFF2-40B4-BE49-F238E27FC236}">
+                <a16:creationId xmlns:a16="http://schemas.microsoft.com/office/drawing/2014/main" id="{6023EB16-4C05-8B3C-FA8E-A1E7710CE854}"/>
               </a:ext>
             </a:extLst>
           </p:cNvPr>
@@ -4421,14 +4276,260 @@
         </p:blipFill>
         <p:spPr>
           <a:xfrm>
-            <a:off x="0" y="2748933"/>
-            <a:ext cx="7108372" cy="1360134"/>
+            <a:off x="0" y="2346003"/>
+            <a:ext cx="5656819" cy="2165994"/>
           </a:xfrm>
           <a:prstGeom prst="rect">
             <a:avLst/>
           </a:prstGeom>
         </p:spPr>
       </p:pic>
+      <p:sp>
+        <p:nvSpPr>
+          <p:cNvPr id="7" name="TextBox 6">
+            <a:extLst>
+              <a:ext uri="{FF2B5EF4-FFF2-40B4-BE49-F238E27FC236}">
+                <a16:creationId xmlns:a16="http://schemas.microsoft.com/office/drawing/2014/main" id="{59B61920-7830-287A-537D-F1AA33D33BBD}"/>
+              </a:ext>
+            </a:extLst>
+          </p:cNvPr>
+          <p:cNvSpPr txBox="1"/>
+          <p:nvPr/>
+        </p:nvSpPr>
+        <p:spPr>
+          <a:xfrm>
+            <a:off x="5660020" y="968829"/>
+            <a:ext cx="6531980" cy="5909310"/>
+          </a:xfrm>
+          <a:prstGeom prst="rect">
+            <a:avLst/>
+          </a:prstGeom>
+          <a:noFill/>
+        </p:spPr>
+        <p:txBody>
+          <a:bodyPr wrap="square">
+            <a:spAutoFit/>
+          </a:bodyPr>
+          <a:lstStyle/>
+          <a:p>
+            <a:pPr marL="285750" indent="-285750">
+              <a:buFont typeface="Arial" panose="020B0604020202020204" pitchFamily="34" charset="0"/>
+              <a:buChar char="•"/>
+            </a:pPr>
+            <a:r>
+              <a:rPr lang="en-US" b="1" dirty="0" err="1"/>
+              <a:t>inputFile</a:t>
+            </a:r>
+            <a:r>
+              <a:rPr lang="en-US" dirty="0"/>
+              <a:t>: path to the input file.</a:t>
+            </a:r>
+            <a:endParaRPr lang="en-US" b="1" dirty="0"/>
+          </a:p>
+          <a:p>
+            <a:pPr marL="285750" indent="-285750">
+              <a:buFont typeface="Arial" panose="020B0604020202020204" pitchFamily="34" charset="0"/>
+              <a:buChar char="•"/>
+            </a:pPr>
+            <a:r>
+              <a:rPr lang="en-US" b="1" dirty="0" err="1"/>
+              <a:t>comparisonsFile</a:t>
+            </a:r>
+            <a:r>
+              <a:rPr lang="en-US" dirty="0"/>
+              <a:t>: path to the comparisons file.</a:t>
+            </a:r>
+            <a:endParaRPr lang="en-US" b="1" dirty="0"/>
+          </a:p>
+          <a:p>
+            <a:pPr marL="285750" indent="-285750">
+              <a:buFont typeface="Arial" panose="020B0604020202020204" pitchFamily="34" charset="0"/>
+              <a:buChar char="•"/>
+            </a:pPr>
+            <a:r>
+              <a:rPr lang="en-US" b="1" dirty="0"/>
+              <a:t>type</a:t>
+            </a:r>
+            <a:r>
+              <a:rPr lang="en-US" dirty="0"/>
+              <a:t>: “metabolomics”, “</a:t>
+            </a:r>
+            <a:r>
+              <a:rPr lang="en-US" dirty="0" err="1"/>
+              <a:t>rppa</a:t>
+            </a:r>
+            <a:r>
+              <a:rPr lang="en-US" dirty="0"/>
+              <a:t>”, or “none”. Use “none” for </a:t>
+            </a:r>
+            <a:r>
+              <a:rPr lang="en-US" dirty="0" err="1"/>
+              <a:t>prenormalized</a:t>
+            </a:r>
+            <a:r>
+              <a:rPr lang="en-US" dirty="0"/>
+              <a:t> data.</a:t>
+            </a:r>
+            <a:endParaRPr lang="en-US" b="1" dirty="0"/>
+          </a:p>
+          <a:p>
+            <a:pPr marL="285750" indent="-285750">
+              <a:buFont typeface="Arial" panose="020B0604020202020204" pitchFamily="34" charset="0"/>
+              <a:buChar char="•"/>
+            </a:pPr>
+            <a:r>
+              <a:rPr lang="en-US" b="1" dirty="0" err="1"/>
+              <a:t>outdir</a:t>
+            </a:r>
+            <a:r>
+              <a:rPr lang="en-US" dirty="0"/>
+              <a:t>: path to output directory. Default is “results” folder in current directory.</a:t>
+            </a:r>
+            <a:endParaRPr lang="en-US" b="1" dirty="0"/>
+          </a:p>
+          <a:p>
+            <a:pPr marL="285750" indent="-285750">
+              <a:buFont typeface="Arial" panose="020B0604020202020204" pitchFamily="34" charset="0"/>
+              <a:buChar char="•"/>
+            </a:pPr>
+            <a:r>
+              <a:rPr lang="en-US" b="1" dirty="0" err="1"/>
+              <a:t>project_title</a:t>
+            </a:r>
+            <a:r>
+              <a:rPr lang="en-US" dirty="0"/>
+              <a:t>: project title to be used in the summary pptx. Default is “Report”.</a:t>
+            </a:r>
+            <a:endParaRPr lang="en-US" b="1" dirty="0"/>
+          </a:p>
+          <a:p>
+            <a:pPr marL="285750" indent="-285750">
+              <a:buFont typeface="Arial" panose="020B0604020202020204" pitchFamily="34" charset="0"/>
+              <a:buChar char="•"/>
+            </a:pPr>
+            <a:r>
+              <a:rPr lang="en-US" b="1" dirty="0" err="1"/>
+              <a:t>project_subtitle</a:t>
+            </a:r>
+            <a:r>
+              <a:rPr lang="en-US" dirty="0"/>
+              <a:t>: project subtitle to be used in the summary pptx. Default is “by”.</a:t>
+            </a:r>
+          </a:p>
+          <a:p>
+            <a:pPr marL="285750" indent="-285750">
+              <a:buFont typeface="Arial" panose="020B0604020202020204" pitchFamily="34" charset="0"/>
+              <a:buChar char="•"/>
+            </a:pPr>
+            <a:r>
+              <a:rPr lang="en-US" b="1" dirty="0" err="1"/>
+              <a:t>heatmap_color_scale</a:t>
+            </a:r>
+            <a:r>
+              <a:rPr lang="en-US" b="1" dirty="0"/>
+              <a:t>: </a:t>
+            </a:r>
+            <a:r>
+              <a:rPr lang="en-US" dirty="0"/>
+              <a:t>specify 3 colors to use for heatmap color scale. Default is c("blue", "black", "yellow").</a:t>
+            </a:r>
+          </a:p>
+          <a:p>
+            <a:pPr marL="285750" indent="-285750">
+              <a:buFont typeface="Arial" panose="020B0604020202020204" pitchFamily="34" charset="0"/>
+              <a:buChar char="•"/>
+            </a:pPr>
+            <a:r>
+              <a:rPr lang="en-US" b="1" dirty="0" err="1"/>
+              <a:t>samplesAreRows</a:t>
+            </a:r>
+            <a:r>
+              <a:rPr lang="en-US" b="1" dirty="0"/>
+              <a:t>: </a:t>
+            </a:r>
+            <a:r>
+              <a:rPr lang="en-US" dirty="0"/>
+              <a:t>TRUE or FALSE. Is the input data in the form of rows of samples? Default is TRUE.</a:t>
+            </a:r>
+          </a:p>
+          <a:p>
+            <a:pPr marL="285750" indent="-285750">
+              <a:buFont typeface="Arial" panose="020B0604020202020204" pitchFamily="34" charset="0"/>
+              <a:buChar char="•"/>
+            </a:pPr>
+            <a:r>
+              <a:rPr lang="en-US" b="1" dirty="0" err="1"/>
+              <a:t>sampleIDRow</a:t>
+            </a:r>
+            <a:r>
+              <a:rPr lang="en-US" b="1" dirty="0"/>
+              <a:t>: </a:t>
+            </a:r>
+            <a:r>
+              <a:rPr lang="en-US" dirty="0"/>
+              <a:t>1 or 2.</a:t>
+            </a:r>
+            <a:r>
+              <a:rPr lang="en-US" b="1" dirty="0"/>
+              <a:t> </a:t>
+            </a:r>
+            <a:r>
+              <a:rPr lang="en-US" dirty="0"/>
+              <a:t>Only for RPPA analysis. Which row of the normalized RPPA data are the Sample IDs present in? Default is 2.</a:t>
+            </a:r>
+          </a:p>
+          <a:p>
+            <a:pPr marL="285750" indent="-285750">
+              <a:buFont typeface="Arial" panose="020B0604020202020204" pitchFamily="34" charset="0"/>
+              <a:buChar char="•"/>
+            </a:pPr>
+            <a:r>
+              <a:rPr lang="en-US" b="1" dirty="0" err="1"/>
+              <a:t>min_signal</a:t>
+            </a:r>
+            <a:r>
+              <a:rPr lang="en-US" b="1" dirty="0"/>
+              <a:t>: </a:t>
+            </a:r>
+            <a:r>
+              <a:rPr lang="en-US" dirty="0"/>
+              <a:t>for each comparison, filtering out features for which none of the samples have signal &gt; </a:t>
+            </a:r>
+            <a:r>
+              <a:rPr lang="en-US" dirty="0" err="1"/>
+              <a:t>min_signal</a:t>
+            </a:r>
+            <a:r>
+              <a:rPr lang="en-US" dirty="0"/>
+              <a:t>. Setting to NULL turns this filter off. Default is NULL.</a:t>
+            </a:r>
+            <a:endParaRPr lang="en-US" b="1" dirty="0"/>
+          </a:p>
+          <a:p>
+            <a:pPr marL="285750" indent="-285750">
+              <a:buFont typeface="Arial" panose="020B0604020202020204" pitchFamily="34" charset="0"/>
+              <a:buChar char="•"/>
+            </a:pPr>
+            <a:r>
+              <a:rPr lang="en-US" b="1" dirty="0" err="1"/>
+              <a:t>scriptPath</a:t>
+            </a:r>
+            <a:r>
+              <a:rPr lang="en-US" dirty="0"/>
+              <a:t>: path to R folder within the </a:t>
+            </a:r>
+            <a:r>
+              <a:rPr lang="en-US" dirty="0" err="1"/>
+              <a:t>runMODAC</a:t>
+            </a:r>
+            <a:r>
+              <a:rPr lang="en-US" dirty="0"/>
+              <a:t> folder on your system.</a:t>
+            </a:r>
+            <a:endParaRPr lang="en-US" b="1" dirty="0"/>
+          </a:p>
+        </p:txBody>
+      </p:sp>
     </p:spTree>
     <p:extLst>
       <p:ext uri="{BB962C8B-B14F-4D97-AF65-F5344CB8AC3E}">
@@ -4508,7 +4609,7 @@
         <p:spPr>
           <a:xfrm>
             <a:off x="3668486" y="1720840"/>
-            <a:ext cx="8523514" cy="4524315"/>
+            <a:ext cx="8523514" cy="4247317"/>
           </a:xfrm>
           <a:prstGeom prst="rect">
             <a:avLst/>
@@ -4605,12 +4706,6 @@
               <a:rPr lang="en-US" dirty="0"/>
               <a:t>: presentation containing a summary of the results.</a:t>
             </a:r>
-          </a:p>
-          <a:p>
-            <a:pPr marL="285750" indent="-285750">
-              <a:buFont typeface="Arial" panose="020B0604020202020204" pitchFamily="34" charset="0"/>
-              <a:buChar char="•"/>
-            </a:pPr>
             <a:endParaRPr lang="en-US" b="1" dirty="0"/>
           </a:p>
           <a:p>
@@ -4633,13 +4728,6 @@
               <a:buFont typeface="Arial" panose="020B0604020202020204" pitchFamily="34" charset="0"/>
               <a:buChar char="•"/>
             </a:pPr>
-            <a:endParaRPr lang="en-US" b="1" dirty="0"/>
-          </a:p>
-          <a:p>
-            <a:pPr marL="285750" indent="-285750">
-              <a:buFont typeface="Arial" panose="020B0604020202020204" pitchFamily="34" charset="0"/>
-              <a:buChar char="•"/>
-            </a:pPr>
             <a:r>
               <a:rPr lang="en-US" b="1" dirty="0" err="1"/>
               <a:t>sessionInfo.txt</a:t>
@@ -4659,13 +4747,6 @@
               <a:buFont typeface="Arial" panose="020B0604020202020204" pitchFamily="34" charset="0"/>
               <a:buChar char="•"/>
             </a:pPr>
-            <a:endParaRPr lang="en-US" b="1" dirty="0"/>
-          </a:p>
-          <a:p>
-            <a:pPr marL="285750" indent="-285750">
-              <a:buFont typeface="Arial" panose="020B0604020202020204" pitchFamily="34" charset="0"/>
-              <a:buChar char="•"/>
-            </a:pPr>
             <a:r>
               <a:rPr lang="en-US" b="1" dirty="0"/>
               <a:t>Signature</a:t>
@@ -4674,16 +4755,34 @@
               <a:rPr lang="en-US" dirty="0"/>
               <a:t>: folder containing the signature files for each comparison.</a:t>
             </a:r>
+          </a:p>
+          <a:p>
+            <a:pPr marL="285750" indent="-285750">
+              <a:buFont typeface="Arial" panose="020B0604020202020204" pitchFamily="34" charset="0"/>
+              <a:buChar char="•"/>
+            </a:pPr>
+            <a:r>
+              <a:rPr lang="en-US" b="1" dirty="0" err="1"/>
+              <a:t>volcano_plots</a:t>
+            </a:r>
+            <a:r>
+              <a:rPr lang="en-US" b="1" dirty="0"/>
+              <a:t>: </a:t>
+            </a:r>
+            <a:r>
+              <a:rPr lang="en-US" dirty="0"/>
+              <a:t>folder containing volcano plots for each t-test comparison in .jpg and .pdf format.</a:t>
+            </a:r>
             <a:endParaRPr lang="en-US" b="1" dirty="0"/>
           </a:p>
         </p:txBody>
       </p:sp>
       <p:pic>
         <p:nvPicPr>
-          <p:cNvPr id="4" name="Picture 3">
-            <a:extLst>
-              <a:ext uri="{FF2B5EF4-FFF2-40B4-BE49-F238E27FC236}">
-                <a16:creationId xmlns:a16="http://schemas.microsoft.com/office/drawing/2014/main" id="{95DFAF70-510F-9DF2-9754-FFD0AE386F31}"/>
+          <p:cNvPr id="5" name="Picture 4">
+            <a:extLst>
+              <a:ext uri="{FF2B5EF4-FFF2-40B4-BE49-F238E27FC236}">
+                <a16:creationId xmlns:a16="http://schemas.microsoft.com/office/drawing/2014/main" id="{154F1753-28AE-E233-48EC-02DA594EC34B}"/>
               </a:ext>
             </a:extLst>
           </p:cNvPr>
@@ -4694,13 +4793,13 @@
         </p:nvPicPr>
         <p:blipFill rotWithShape="1">
           <a:blip r:embed="rId2"/>
-          <a:srcRect l="11607" r="6464"/>
+          <a:srcRect t="9416"/>
           <a:stretch/>
         </p:blipFill>
         <p:spPr>
           <a:xfrm>
-            <a:off x="0" y="1129347"/>
-            <a:ext cx="3419605" cy="5260204"/>
+            <a:off x="0" y="1616371"/>
+            <a:ext cx="3665008" cy="4456254"/>
           </a:xfrm>
           <a:prstGeom prst="rect">
             <a:avLst/>
@@ -4710,7 +4809,7 @@
     </p:spTree>
     <p:extLst>
       <p:ext uri="{BB962C8B-B14F-4D97-AF65-F5344CB8AC3E}">
-        <p14:creationId xmlns:p14="http://schemas.microsoft.com/office/powerpoint/2010/main" val="3898046649"/>
+        <p14:creationId xmlns:p14="http://schemas.microsoft.com/office/powerpoint/2010/main" val="255574371"/>
       </p:ext>
     </p:extLst>
   </p:cSld>
@@ -4721,7 +4820,7 @@
 </file>
 
 <file path=ppt/slides/slide16.xml><?xml version="1.0" encoding="utf-8"?>
-<p:sld xmlns:a="http://schemas.openxmlformats.org/drawingml/2006/main" xmlns:r="http://schemas.openxmlformats.org/officeDocument/2006/relationships" xmlns:p="http://schemas.openxmlformats.org/presentationml/2006/main" show="0">
+<p:sld xmlns:a="http://schemas.openxmlformats.org/drawingml/2006/main" xmlns:r="http://schemas.openxmlformats.org/officeDocument/2006/relationships" xmlns:p="http://schemas.openxmlformats.org/presentationml/2006/main">
   <p:cSld>
     <p:spTree>
       <p:nvGrpSpPr>
@@ -4742,6 +4841,92 @@
           <p:cNvPr id="2" name="Title 1">
             <a:extLst>
               <a:ext uri="{FF2B5EF4-FFF2-40B4-BE49-F238E27FC236}">
+                <a16:creationId xmlns:a16="http://schemas.microsoft.com/office/drawing/2014/main" id="{6C8AEA82-6506-DFFE-6495-214648803214}"/>
+              </a:ext>
+            </a:extLst>
+          </p:cNvPr>
+          <p:cNvSpPr>
+            <a:spLocks noGrp="1"/>
+          </p:cNvSpPr>
+          <p:nvPr>
+            <p:ph type="title"/>
+          </p:nvPr>
+        </p:nvSpPr>
+        <p:spPr/>
+        <p:txBody>
+          <a:bodyPr/>
+          <a:lstStyle/>
+          <a:p>
+            <a:r>
+              <a:rPr lang="en-US" dirty="0"/>
+              <a:t>Transposed Data (Columns of Samples)</a:t>
+            </a:r>
+          </a:p>
+        </p:txBody>
+      </p:sp>
+      <p:sp>
+        <p:nvSpPr>
+          <p:cNvPr id="3" name="Text Placeholder 2">
+            <a:extLst>
+              <a:ext uri="{FF2B5EF4-FFF2-40B4-BE49-F238E27FC236}">
+                <a16:creationId xmlns:a16="http://schemas.microsoft.com/office/drawing/2014/main" id="{61507DBF-B79C-7DA2-07B5-64166409BA1C}"/>
+              </a:ext>
+            </a:extLst>
+          </p:cNvPr>
+          <p:cNvSpPr>
+            <a:spLocks noGrp="1"/>
+          </p:cNvSpPr>
+          <p:nvPr>
+            <p:ph type="body" idx="1"/>
+          </p:nvPr>
+        </p:nvSpPr>
+        <p:spPr/>
+        <p:txBody>
+          <a:bodyPr/>
+          <a:lstStyle/>
+          <a:p>
+            <a:r>
+              <a:rPr lang="en-US" dirty="0"/>
+              <a:t>Example 2</a:t>
+            </a:r>
+          </a:p>
+        </p:txBody>
+      </p:sp>
+    </p:spTree>
+    <p:extLst>
+      <p:ext uri="{BB962C8B-B14F-4D97-AF65-F5344CB8AC3E}">
+        <p14:creationId xmlns:p14="http://schemas.microsoft.com/office/powerpoint/2010/main" val="854006153"/>
+      </p:ext>
+    </p:extLst>
+  </p:cSld>
+  <p:clrMapOvr>
+    <a:masterClrMapping/>
+  </p:clrMapOvr>
+</p:sld>
+</file>
+
+<file path=ppt/slides/slide17.xml><?xml version="1.0" encoding="utf-8"?>
+<p:sld xmlns:a="http://schemas.openxmlformats.org/drawingml/2006/main" xmlns:r="http://schemas.openxmlformats.org/officeDocument/2006/relationships" xmlns:p="http://schemas.openxmlformats.org/presentationml/2006/main">
+  <p:cSld>
+    <p:spTree>
+      <p:nvGrpSpPr>
+        <p:cNvPr id="1" name=""/>
+        <p:cNvGrpSpPr/>
+        <p:nvPr/>
+      </p:nvGrpSpPr>
+      <p:grpSpPr>
+        <a:xfrm>
+          <a:off x="0" y="0"/>
+          <a:ext cx="0" cy="0"/>
+          <a:chOff x="0" y="0"/>
+          <a:chExt cx="0" cy="0"/>
+        </a:xfrm>
+      </p:grpSpPr>
+      <p:sp>
+        <p:nvSpPr>
+          <p:cNvPr id="2" name="Title 1">
+            <a:extLst>
+              <a:ext uri="{FF2B5EF4-FFF2-40B4-BE49-F238E27FC236}">
                 <a16:creationId xmlns:a16="http://schemas.microsoft.com/office/drawing/2014/main" id="{7F0B5931-2EE9-5ED4-D771-2F12E9BB97E4}"/>
               </a:ext>
             </a:extLst>
@@ -4766,17 +4951,86 @@
             <a:pPr algn="ctr"/>
             <a:r>
               <a:rPr lang="en-US" dirty="0"/>
-              <a:t>Example 3 – Transposed Data</a:t>
+              <a:t>Input File</a:t>
+            </a:r>
+          </a:p>
+        </p:txBody>
+      </p:sp>
+      <p:sp>
+        <p:nvSpPr>
+          <p:cNvPr id="3" name="TextBox 2">
+            <a:extLst>
+              <a:ext uri="{FF2B5EF4-FFF2-40B4-BE49-F238E27FC236}">
+                <a16:creationId xmlns:a16="http://schemas.microsoft.com/office/drawing/2014/main" id="{7D10777D-6F39-622B-2D04-39C9328E38AB}"/>
+              </a:ext>
+            </a:extLst>
+          </p:cNvPr>
+          <p:cNvSpPr txBox="1"/>
+          <p:nvPr/>
+        </p:nvSpPr>
+        <p:spPr>
+          <a:xfrm>
+            <a:off x="7021286" y="2413334"/>
+            <a:ext cx="5170714" cy="1200329"/>
+          </a:xfrm>
+          <a:prstGeom prst="rect">
+            <a:avLst/>
+          </a:prstGeom>
+          <a:noFill/>
+        </p:spPr>
+        <p:txBody>
+          <a:bodyPr wrap="square" rtlCol="0">
+            <a:spAutoFit/>
+          </a:bodyPr>
+          <a:lstStyle/>
+          <a:p>
+            <a:pPr marL="285750" indent="-285750">
+              <a:buFont typeface="Arial" panose="020B0604020202020204" pitchFamily="34" charset="0"/>
+              <a:buChar char="•"/>
+            </a:pPr>
+            <a:r>
+              <a:rPr lang="en-US" dirty="0"/>
+              <a:t>Rows of features</a:t>
+            </a:r>
+          </a:p>
+          <a:p>
+            <a:pPr marL="285750" indent="-285750">
+              <a:buFont typeface="Arial" panose="020B0604020202020204" pitchFamily="34" charset="0"/>
+              <a:buChar char="•"/>
+            </a:pPr>
+            <a:r>
+              <a:rPr lang="en-US" dirty="0"/>
+              <a:t>First column contains feature names</a:t>
+            </a:r>
+          </a:p>
+          <a:p>
+            <a:pPr marL="285750" indent="-285750">
+              <a:buFont typeface="Arial" panose="020B0604020202020204" pitchFamily="34" charset="0"/>
+              <a:buChar char="•"/>
+            </a:pPr>
+            <a:r>
+              <a:rPr lang="en-US" dirty="0"/>
+              <a:t>Remaining columns are samples</a:t>
+            </a:r>
+          </a:p>
+          <a:p>
+            <a:pPr marL="285750" indent="-285750">
+              <a:buFont typeface="Arial" panose="020B0604020202020204" pitchFamily="34" charset="0"/>
+              <a:buChar char="•"/>
+            </a:pPr>
+            <a:r>
+              <a:rPr lang="en-US" dirty="0"/>
+              <a:t>No NAs or blank cells</a:t>
             </a:r>
           </a:p>
         </p:txBody>
       </p:sp>
       <p:pic>
         <p:nvPicPr>
-          <p:cNvPr id="6" name="Picture 5">
-            <a:extLst>
-              <a:ext uri="{FF2B5EF4-FFF2-40B4-BE49-F238E27FC236}">
-                <a16:creationId xmlns:a16="http://schemas.microsoft.com/office/drawing/2014/main" id="{D7394A63-AB5C-ADA2-4E84-56F68C8D9E7A}"/>
+          <p:cNvPr id="7" name="Content Placeholder 8">
+            <a:extLst>
+              <a:ext uri="{FF2B5EF4-FFF2-40B4-BE49-F238E27FC236}">
+                <a16:creationId xmlns:a16="http://schemas.microsoft.com/office/drawing/2014/main" id="{F4600DFE-11A7-C159-B326-4F60E035BB02}"/>
               </a:ext>
             </a:extLst>
           </p:cNvPr>
@@ -4793,97 +5047,8 @@
         </p:blipFill>
         <p:spPr>
           <a:xfrm>
-            <a:off x="5321743" y="968828"/>
-            <a:ext cx="3320064" cy="4229473"/>
-          </a:xfrm>
-          <a:prstGeom prst="rect">
-            <a:avLst/>
-          </a:prstGeom>
-        </p:spPr>
-      </p:pic>
-      <p:pic>
-        <p:nvPicPr>
-          <p:cNvPr id="7" name="Picture 6">
-            <a:extLst>
-              <a:ext uri="{FF2B5EF4-FFF2-40B4-BE49-F238E27FC236}">
-                <a16:creationId xmlns:a16="http://schemas.microsoft.com/office/drawing/2014/main" id="{89162090-5B64-25D3-2B09-191B61D29F1A}"/>
-              </a:ext>
-            </a:extLst>
-          </p:cNvPr>
-          <p:cNvPicPr>
-            <a:picLocks noChangeAspect="1"/>
-          </p:cNvPicPr>
-          <p:nvPr/>
-        </p:nvPicPr>
-        <p:blipFill>
-          <a:blip r:embed="rId3"/>
-          <a:stretch>
-            <a:fillRect/>
-          </a:stretch>
-        </p:blipFill>
-        <p:spPr>
-          <a:xfrm>
-            <a:off x="9191135" y="974725"/>
-            <a:ext cx="3000865" cy="5883275"/>
-          </a:xfrm>
-          <a:prstGeom prst="rect">
-            <a:avLst/>
-          </a:prstGeom>
-        </p:spPr>
-      </p:pic>
-      <p:pic>
-        <p:nvPicPr>
-          <p:cNvPr id="9" name="Content Placeholder 8">
-            <a:extLst>
-              <a:ext uri="{FF2B5EF4-FFF2-40B4-BE49-F238E27FC236}">
-                <a16:creationId xmlns:a16="http://schemas.microsoft.com/office/drawing/2014/main" id="{9AC83444-64D6-2F60-C23C-702F8C270CF0}"/>
-              </a:ext>
-            </a:extLst>
-          </p:cNvPr>
-          <p:cNvPicPr>
-            <a:picLocks noGrp="1" noChangeAspect="1"/>
-          </p:cNvPicPr>
-          <p:nvPr>
-            <p:ph idx="1"/>
-          </p:nvPr>
-        </p:nvPicPr>
-        <p:blipFill>
-          <a:blip r:embed="rId4"/>
-          <a:stretch>
-            <a:fillRect/>
-          </a:stretch>
-        </p:blipFill>
-        <p:spPr>
-          <a:xfrm>
-            <a:off x="-1" y="968828"/>
-            <a:ext cx="4774471" cy="4655358"/>
-          </a:xfrm>
-        </p:spPr>
-      </p:pic>
-      <p:pic>
-        <p:nvPicPr>
-          <p:cNvPr id="11" name="Picture 10">
-            <a:extLst>
-              <a:ext uri="{FF2B5EF4-FFF2-40B4-BE49-F238E27FC236}">
-                <a16:creationId xmlns:a16="http://schemas.microsoft.com/office/drawing/2014/main" id="{40F0E5F8-398B-025B-2100-8FA48F4A6228}"/>
-              </a:ext>
-            </a:extLst>
-          </p:cNvPr>
-          <p:cNvPicPr>
-            <a:picLocks noChangeAspect="1"/>
-          </p:cNvPicPr>
-          <p:nvPr/>
-        </p:nvPicPr>
-        <p:blipFill>
-          <a:blip r:embed="rId5"/>
-          <a:stretch>
-            <a:fillRect/>
-          </a:stretch>
-        </p:blipFill>
-        <p:spPr>
-          <a:xfrm>
-            <a:off x="3095135" y="5653844"/>
-            <a:ext cx="6096000" cy="1198260"/>
+            <a:off x="0" y="968829"/>
+            <a:ext cx="6039854" cy="5889172"/>
           </a:xfrm>
           <a:prstGeom prst="rect">
             <a:avLst/>
@@ -4893,7 +5058,7 @@
     </p:spTree>
     <p:extLst>
       <p:ext uri="{BB962C8B-B14F-4D97-AF65-F5344CB8AC3E}">
-        <p14:creationId xmlns:p14="http://schemas.microsoft.com/office/powerpoint/2010/main" val="883192343"/>
+        <p14:creationId xmlns:p14="http://schemas.microsoft.com/office/powerpoint/2010/main" val="1089035728"/>
       </p:ext>
     </p:extLst>
   </p:cSld>
@@ -4903,7 +5068,1453 @@
 </p:sld>
 </file>
 
-<file path=ppt/slides/slide17.xml><?xml version="1.0" encoding="utf-8"?>
+<file path=ppt/slides/slide18.xml><?xml version="1.0" encoding="utf-8"?>
+<p:sld xmlns:a="http://schemas.openxmlformats.org/drawingml/2006/main" xmlns:r="http://schemas.openxmlformats.org/officeDocument/2006/relationships" xmlns:p="http://schemas.openxmlformats.org/presentationml/2006/main">
+  <p:cSld>
+    <p:spTree>
+      <p:nvGrpSpPr>
+        <p:cNvPr id="1" name=""/>
+        <p:cNvGrpSpPr/>
+        <p:nvPr/>
+      </p:nvGrpSpPr>
+      <p:grpSpPr>
+        <a:xfrm>
+          <a:off x="0" y="0"/>
+          <a:ext cx="0" cy="0"/>
+          <a:chOff x="0" y="0"/>
+          <a:chExt cx="0" cy="0"/>
+        </a:xfrm>
+      </p:grpSpPr>
+      <p:sp>
+        <p:nvSpPr>
+          <p:cNvPr id="2" name="Title 1">
+            <a:extLst>
+              <a:ext uri="{FF2B5EF4-FFF2-40B4-BE49-F238E27FC236}">
+                <a16:creationId xmlns:a16="http://schemas.microsoft.com/office/drawing/2014/main" id="{7F0B5931-2EE9-5ED4-D771-2F12E9BB97E4}"/>
+              </a:ext>
+            </a:extLst>
+          </p:cNvPr>
+          <p:cNvSpPr>
+            <a:spLocks noGrp="1"/>
+          </p:cNvSpPr>
+          <p:nvPr>
+            <p:ph type="title"/>
+          </p:nvPr>
+        </p:nvSpPr>
+        <p:spPr>
+          <a:xfrm>
+            <a:off x="838200" y="5896"/>
+            <a:ext cx="10515600" cy="962933"/>
+          </a:xfrm>
+        </p:spPr>
+        <p:txBody>
+          <a:bodyPr/>
+          <a:lstStyle/>
+          <a:p>
+            <a:pPr algn="ctr"/>
+            <a:r>
+              <a:rPr lang="en-US" dirty="0"/>
+              <a:t>Comparisons File – Settings</a:t>
+            </a:r>
+          </a:p>
+        </p:txBody>
+      </p:sp>
+      <p:pic>
+        <p:nvPicPr>
+          <p:cNvPr id="5" name="Picture 4">
+            <a:extLst>
+              <a:ext uri="{FF2B5EF4-FFF2-40B4-BE49-F238E27FC236}">
+                <a16:creationId xmlns:a16="http://schemas.microsoft.com/office/drawing/2014/main" id="{171B2966-A8FF-7D67-943D-6F08604790FB}"/>
+              </a:ext>
+            </a:extLst>
+          </p:cNvPr>
+          <p:cNvPicPr>
+            <a:picLocks noChangeAspect="1"/>
+          </p:cNvPicPr>
+          <p:nvPr/>
+        </p:nvPicPr>
+        <p:blipFill>
+          <a:blip r:embed="rId2"/>
+          <a:stretch>
+            <a:fillRect/>
+          </a:stretch>
+        </p:blipFill>
+        <p:spPr>
+          <a:xfrm>
+            <a:off x="0" y="968829"/>
+            <a:ext cx="5564911" cy="5500947"/>
+          </a:xfrm>
+          <a:prstGeom prst="rect">
+            <a:avLst/>
+          </a:prstGeom>
+        </p:spPr>
+      </p:pic>
+      <p:sp>
+        <p:nvSpPr>
+          <p:cNvPr id="7" name="TextBox 6">
+            <a:extLst>
+              <a:ext uri="{FF2B5EF4-FFF2-40B4-BE49-F238E27FC236}">
+                <a16:creationId xmlns:a16="http://schemas.microsoft.com/office/drawing/2014/main" id="{DA689E04-D282-3827-501B-D45D995F777B}"/>
+              </a:ext>
+            </a:extLst>
+          </p:cNvPr>
+          <p:cNvSpPr txBox="1"/>
+          <p:nvPr/>
+        </p:nvSpPr>
+        <p:spPr>
+          <a:xfrm>
+            <a:off x="5564911" y="1006839"/>
+            <a:ext cx="6627089" cy="5509200"/>
+          </a:xfrm>
+          <a:prstGeom prst="rect">
+            <a:avLst/>
+          </a:prstGeom>
+          <a:noFill/>
+        </p:spPr>
+        <p:txBody>
+          <a:bodyPr wrap="square" rtlCol="0">
+            <a:spAutoFit/>
+          </a:bodyPr>
+          <a:lstStyle/>
+          <a:p>
+            <a:pPr marL="285750" indent="-285750">
+              <a:buFont typeface="Arial" panose="020B0604020202020204" pitchFamily="34" charset="0"/>
+              <a:buChar char="•"/>
+            </a:pPr>
+            <a:r>
+              <a:rPr lang="en-US" sz="1600" b="1" dirty="0" err="1"/>
+              <a:t>padj_method</a:t>
+            </a:r>
+            <a:r>
+              <a:rPr lang="en-US" sz="1600" dirty="0"/>
+              <a:t>: “</a:t>
+            </a:r>
+            <a:r>
+              <a:rPr lang="en-US" sz="1600" dirty="0" err="1"/>
+              <a:t>pval</a:t>
+            </a:r>
+            <a:r>
+              <a:rPr lang="en-US" sz="1600" dirty="0"/>
+              <a:t>” or “</a:t>
+            </a:r>
+            <a:r>
+              <a:rPr lang="en-US" sz="1600" dirty="0" err="1"/>
+              <a:t>fdr</a:t>
+            </a:r>
+            <a:r>
+              <a:rPr lang="en-US" sz="1600" dirty="0"/>
+              <a:t>”. Use p-value or FDR for generating filtered heatmaps and signature files?</a:t>
+            </a:r>
+          </a:p>
+          <a:p>
+            <a:pPr marL="285750" indent="-285750">
+              <a:buFont typeface="Arial" panose="020B0604020202020204" pitchFamily="34" charset="0"/>
+              <a:buChar char="•"/>
+            </a:pPr>
+            <a:r>
+              <a:rPr lang="en-US" sz="1600" b="1" dirty="0" err="1"/>
+              <a:t>padj_cutoff</a:t>
+            </a:r>
+            <a:r>
+              <a:rPr lang="en-US" sz="1600" dirty="0"/>
+              <a:t>: p-value or FDR threshold for generating filtered heatmaps and signature files.</a:t>
+            </a:r>
+          </a:p>
+          <a:p>
+            <a:pPr marL="285750" indent="-285750">
+              <a:buFont typeface="Arial" panose="020B0604020202020204" pitchFamily="34" charset="0"/>
+              <a:buChar char="•"/>
+            </a:pPr>
+            <a:r>
+              <a:rPr lang="en-US" sz="1600" b="1" dirty="0"/>
+              <a:t>compute_log2fc</a:t>
+            </a:r>
+            <a:r>
+              <a:rPr lang="en-US" sz="1600" dirty="0"/>
+              <a:t>: TRUE or FALSE. Calculate log2 and linear fold change or only linear fold change?</a:t>
+            </a:r>
+          </a:p>
+          <a:p>
+            <a:pPr marL="285750" indent="-285750">
+              <a:buFont typeface="Arial" panose="020B0604020202020204" pitchFamily="34" charset="0"/>
+              <a:buChar char="•"/>
+            </a:pPr>
+            <a:r>
+              <a:rPr lang="en-US" sz="1600" b="1" dirty="0" err="1"/>
+              <a:t>linear_fc_cutoff</a:t>
+            </a:r>
+            <a:r>
+              <a:rPr lang="en-US" sz="1600" dirty="0"/>
+              <a:t>: Fold change threshold for generating signature files.</a:t>
+            </a:r>
+          </a:p>
+          <a:p>
+            <a:pPr marL="285750" indent="-285750">
+              <a:buFont typeface="Arial" panose="020B0604020202020204" pitchFamily="34" charset="0"/>
+              <a:buChar char="•"/>
+            </a:pPr>
+            <a:r>
+              <a:rPr lang="en-US" sz="1600" b="1" dirty="0" err="1"/>
+              <a:t>QC_row</a:t>
+            </a:r>
+            <a:r>
+              <a:rPr lang="en-US" sz="1600" dirty="0"/>
+              <a:t>: row index for the first QC sample.</a:t>
+            </a:r>
+          </a:p>
+          <a:p>
+            <a:pPr marL="285750" indent="-285750">
+              <a:buFont typeface="Arial" panose="020B0604020202020204" pitchFamily="34" charset="0"/>
+              <a:buChar char="•"/>
+            </a:pPr>
+            <a:r>
+              <a:rPr lang="en-US" sz="1600" b="1" dirty="0" err="1"/>
+              <a:t>cv_cutoff_internal_standard</a:t>
+            </a:r>
+            <a:r>
+              <a:rPr lang="en-US" sz="1600" dirty="0"/>
+              <a:t>: Coefficient of variation (CV) threshold for internal standard (ISTD). Only ISTDs with CV lower than this threshold will be considered for normalization.</a:t>
+            </a:r>
+          </a:p>
+          <a:p>
+            <a:pPr marL="285750" indent="-285750">
+              <a:buFont typeface="Arial" panose="020B0604020202020204" pitchFamily="34" charset="0"/>
+              <a:buChar char="•"/>
+            </a:pPr>
+            <a:r>
+              <a:rPr lang="en-US" sz="1600" b="1" dirty="0"/>
+              <a:t>normalization</a:t>
+            </a:r>
+            <a:r>
+              <a:rPr lang="en-US" sz="1600" dirty="0"/>
+              <a:t>: “</a:t>
+            </a:r>
+            <a:r>
+              <a:rPr lang="en-US" sz="1600" dirty="0" err="1"/>
+              <a:t>istd</a:t>
+            </a:r>
+            <a:r>
+              <a:rPr lang="en-US" sz="1600" dirty="0"/>
+              <a:t>”, “</a:t>
+            </a:r>
+            <a:r>
+              <a:rPr lang="en-US" sz="1600" dirty="0" err="1"/>
+              <a:t>iqr</a:t>
+            </a:r>
+            <a:r>
+              <a:rPr lang="en-US" sz="1600" dirty="0"/>
+              <a:t>”, or “none”. Type of normalization to be performed – internal standard, interquartile range, or none?</a:t>
+            </a:r>
+          </a:p>
+          <a:p>
+            <a:pPr marL="285750" indent="-285750">
+              <a:buFont typeface="Arial" panose="020B0604020202020204" pitchFamily="34" charset="0"/>
+              <a:buChar char="•"/>
+            </a:pPr>
+            <a:r>
+              <a:rPr lang="en-US" sz="1600" b="1" dirty="0" err="1"/>
+              <a:t>input_data_space</a:t>
+            </a:r>
+            <a:r>
+              <a:rPr lang="en-US" sz="1600" dirty="0"/>
+              <a:t>: “linear” or “log2”. Input data is in linear space or log2 space?</a:t>
+            </a:r>
+          </a:p>
+          <a:p>
+            <a:pPr marL="285750" indent="-285750">
+              <a:buFont typeface="Arial" panose="020B0604020202020204" pitchFamily="34" charset="0"/>
+              <a:buChar char="•"/>
+            </a:pPr>
+            <a:r>
+              <a:rPr lang="en-US" sz="1600" b="1" dirty="0" err="1"/>
+              <a:t>differential_analysis_space</a:t>
+            </a:r>
+            <a:r>
+              <a:rPr lang="en-US" sz="1600" dirty="0"/>
+              <a:t>: “linear” or “log2”. For differential analysis, transform the data to linear or log2 space?</a:t>
+            </a:r>
+            <a:endParaRPr lang="en-US" sz="1600" b="1" dirty="0"/>
+          </a:p>
+          <a:p>
+            <a:pPr marL="285750" indent="-285750">
+              <a:buFont typeface="Arial" panose="020B0604020202020204" pitchFamily="34" charset="0"/>
+              <a:buChar char="•"/>
+            </a:pPr>
+            <a:r>
+              <a:rPr lang="en-US" sz="1600" b="1" dirty="0"/>
+              <a:t>tab</a:t>
+            </a:r>
+            <a:r>
+              <a:rPr lang="en-US" sz="1600" dirty="0"/>
+              <a:t>: For ISTD normalization, write down names of all the methods below this. For any other normalization, leave blank.</a:t>
+            </a:r>
+          </a:p>
+          <a:p>
+            <a:pPr marL="285750" indent="-285750">
+              <a:buFont typeface="Arial" panose="020B0604020202020204" pitchFamily="34" charset="0"/>
+              <a:buChar char="•"/>
+            </a:pPr>
+            <a:r>
+              <a:rPr lang="en-US" sz="1600" b="1" dirty="0" err="1"/>
+              <a:t>ISTD_column</a:t>
+            </a:r>
+            <a:r>
+              <a:rPr lang="en-US" sz="1600" dirty="0"/>
+              <a:t>: For ISTD normalization, write down index of the first (or only) internal standard methods below this for all the methods. For any other normalization, leave blank.</a:t>
+            </a:r>
+          </a:p>
+        </p:txBody>
+      </p:sp>
+    </p:spTree>
+    <p:extLst>
+      <p:ext uri="{BB962C8B-B14F-4D97-AF65-F5344CB8AC3E}">
+        <p14:creationId xmlns:p14="http://schemas.microsoft.com/office/powerpoint/2010/main" val="4080763197"/>
+      </p:ext>
+    </p:extLst>
+  </p:cSld>
+  <p:clrMapOvr>
+    <a:masterClrMapping/>
+  </p:clrMapOvr>
+</p:sld>
+</file>
+
+<file path=ppt/slides/slide19.xml><?xml version="1.0" encoding="utf-8"?>
+<p:sld xmlns:a="http://schemas.openxmlformats.org/drawingml/2006/main" xmlns:r="http://schemas.openxmlformats.org/officeDocument/2006/relationships" xmlns:p="http://schemas.openxmlformats.org/presentationml/2006/main">
+  <p:cSld>
+    <p:spTree>
+      <p:nvGrpSpPr>
+        <p:cNvPr id="1" name=""/>
+        <p:cNvGrpSpPr/>
+        <p:nvPr/>
+      </p:nvGrpSpPr>
+      <p:grpSpPr>
+        <a:xfrm>
+          <a:off x="0" y="0"/>
+          <a:ext cx="0" cy="0"/>
+          <a:chOff x="0" y="0"/>
+          <a:chExt cx="0" cy="0"/>
+        </a:xfrm>
+      </p:grpSpPr>
+      <p:sp>
+        <p:nvSpPr>
+          <p:cNvPr id="2" name="Title 1">
+            <a:extLst>
+              <a:ext uri="{FF2B5EF4-FFF2-40B4-BE49-F238E27FC236}">
+                <a16:creationId xmlns:a16="http://schemas.microsoft.com/office/drawing/2014/main" id="{7F0B5931-2EE9-5ED4-D771-2F12E9BB97E4}"/>
+              </a:ext>
+            </a:extLst>
+          </p:cNvPr>
+          <p:cNvSpPr>
+            <a:spLocks noGrp="1"/>
+          </p:cNvSpPr>
+          <p:nvPr>
+            <p:ph type="title"/>
+          </p:nvPr>
+        </p:nvSpPr>
+        <p:spPr>
+          <a:xfrm>
+            <a:off x="838200" y="5896"/>
+            <a:ext cx="10515600" cy="962933"/>
+          </a:xfrm>
+        </p:spPr>
+        <p:txBody>
+          <a:bodyPr/>
+          <a:lstStyle/>
+          <a:p>
+            <a:pPr algn="ctr"/>
+            <a:r>
+              <a:rPr lang="en-US" dirty="0"/>
+              <a:t>Comparisons File - Comparisons</a:t>
+            </a:r>
+          </a:p>
+        </p:txBody>
+      </p:sp>
+      <p:pic>
+        <p:nvPicPr>
+          <p:cNvPr id="11" name="Picture 10">
+            <a:extLst>
+              <a:ext uri="{FF2B5EF4-FFF2-40B4-BE49-F238E27FC236}">
+                <a16:creationId xmlns:a16="http://schemas.microsoft.com/office/drawing/2014/main" id="{D980C858-F3A7-9AD6-85CD-FBFFDA310A59}"/>
+              </a:ext>
+            </a:extLst>
+          </p:cNvPr>
+          <p:cNvPicPr>
+            <a:picLocks noChangeAspect="1"/>
+          </p:cNvPicPr>
+          <p:nvPr/>
+        </p:nvPicPr>
+        <p:blipFill>
+          <a:blip r:embed="rId2"/>
+          <a:stretch>
+            <a:fillRect/>
+          </a:stretch>
+        </p:blipFill>
+        <p:spPr>
+          <a:xfrm>
+            <a:off x="1863253" y="974725"/>
+            <a:ext cx="3000865" cy="5883275"/>
+          </a:xfrm>
+          <a:prstGeom prst="rect">
+            <a:avLst/>
+          </a:prstGeom>
+        </p:spPr>
+      </p:pic>
+      <p:sp>
+        <p:nvSpPr>
+          <p:cNvPr id="3" name="TextBox 2">
+            <a:extLst>
+              <a:ext uri="{FF2B5EF4-FFF2-40B4-BE49-F238E27FC236}">
+                <a16:creationId xmlns:a16="http://schemas.microsoft.com/office/drawing/2014/main" id="{1B8B9C20-FB97-BA6A-E4A6-FD3F463E2F8C}"/>
+              </a:ext>
+            </a:extLst>
+          </p:cNvPr>
+          <p:cNvSpPr txBox="1"/>
+          <p:nvPr/>
+        </p:nvSpPr>
+        <p:spPr>
+          <a:xfrm>
+            <a:off x="5889171" y="968829"/>
+            <a:ext cx="5747658" cy="3693319"/>
+          </a:xfrm>
+          <a:prstGeom prst="rect">
+            <a:avLst/>
+          </a:prstGeom>
+          <a:noFill/>
+        </p:spPr>
+        <p:txBody>
+          <a:bodyPr wrap="square" rtlCol="0">
+            <a:spAutoFit/>
+          </a:bodyPr>
+          <a:lstStyle/>
+          <a:p>
+            <a:pPr marL="285750" indent="-285750">
+              <a:buFont typeface="Arial" panose="020B0604020202020204" pitchFamily="34" charset="0"/>
+              <a:buChar char="•"/>
+            </a:pPr>
+            <a:r>
+              <a:rPr lang="en-US" b="1" dirty="0" err="1"/>
+              <a:t>comparison_name</a:t>
+            </a:r>
+            <a:r>
+              <a:rPr lang="en-US" dirty="0"/>
+              <a:t>: A label for this comparison. Format must be “</a:t>
+            </a:r>
+            <a:r>
+              <a:rPr lang="en-US" dirty="0" err="1"/>
+              <a:t>testgroup_over_controlgroup</a:t>
+            </a:r>
+            <a:r>
+              <a:rPr lang="en-US" dirty="0"/>
+              <a:t>” for t-test and “group1_group2_..._</a:t>
+            </a:r>
+            <a:r>
+              <a:rPr lang="en-US" dirty="0" err="1"/>
+              <a:t>groupn</a:t>
+            </a:r>
+            <a:r>
+              <a:rPr lang="en-US" dirty="0"/>
+              <a:t>” for ANOVA.</a:t>
+            </a:r>
+          </a:p>
+          <a:p>
+            <a:pPr marL="285750" indent="-285750">
+              <a:buFont typeface="Arial" panose="020B0604020202020204" pitchFamily="34" charset="0"/>
+              <a:buChar char="•"/>
+            </a:pPr>
+            <a:r>
+              <a:rPr lang="en-US" b="1" dirty="0"/>
+              <a:t>test</a:t>
+            </a:r>
+            <a:r>
+              <a:rPr lang="en-US" dirty="0"/>
+              <a:t>: ”t-test” or “</a:t>
+            </a:r>
+            <a:r>
+              <a:rPr lang="en-US" dirty="0" err="1"/>
+              <a:t>anova</a:t>
+            </a:r>
+            <a:r>
+              <a:rPr lang="en-US" dirty="0"/>
+              <a:t>”. Which statistical test to perform?</a:t>
+            </a:r>
+          </a:p>
+          <a:p>
+            <a:pPr marL="285750" indent="-285750">
+              <a:buFont typeface="Arial" panose="020B0604020202020204" pitchFamily="34" charset="0"/>
+              <a:buChar char="•"/>
+            </a:pPr>
+            <a:r>
+              <a:rPr lang="en-US" b="1" dirty="0" err="1"/>
+              <a:t>group_order_ctrl_test</a:t>
+            </a:r>
+            <a:r>
+              <a:rPr lang="en-US" dirty="0"/>
+              <a:t>: order in which to display the comparison groups in boxplots and heatmaps.</a:t>
+            </a:r>
+          </a:p>
+          <a:p>
+            <a:pPr marL="285750" indent="-285750">
+              <a:buFont typeface="Arial" panose="020B0604020202020204" pitchFamily="34" charset="0"/>
+              <a:buChar char="•"/>
+            </a:pPr>
+            <a:r>
+              <a:rPr lang="en-US" b="1" dirty="0"/>
+              <a:t>group</a:t>
+            </a:r>
+            <a:r>
+              <a:rPr lang="en-US" dirty="0"/>
+              <a:t>: group that each sample belongs to. This can have all the groups or only groups specific to this comparison.</a:t>
+            </a:r>
+          </a:p>
+          <a:p>
+            <a:pPr marL="285750" indent="-285750">
+              <a:buFont typeface="Arial" panose="020B0604020202020204" pitchFamily="34" charset="0"/>
+              <a:buChar char="•"/>
+            </a:pPr>
+            <a:r>
+              <a:rPr lang="en-US" b="1" dirty="0"/>
+              <a:t>sample</a:t>
+            </a:r>
+            <a:r>
+              <a:rPr lang="en-US" dirty="0"/>
+              <a:t>: sample ID for all the samples or only samples belonging to the groups specific to this comparison.</a:t>
+            </a:r>
+          </a:p>
+          <a:p>
+            <a:pPr marL="285750" indent="-285750">
+              <a:buFont typeface="Arial" panose="020B0604020202020204" pitchFamily="34" charset="0"/>
+              <a:buChar char="•"/>
+            </a:pPr>
+            <a:r>
+              <a:rPr lang="en-US" b="1" dirty="0"/>
+              <a:t>Repeat this process creating a new sheet for all comparisons.</a:t>
+            </a:r>
+          </a:p>
+        </p:txBody>
+      </p:sp>
+    </p:spTree>
+    <p:extLst>
+      <p:ext uri="{BB962C8B-B14F-4D97-AF65-F5344CB8AC3E}">
+        <p14:creationId xmlns:p14="http://schemas.microsoft.com/office/powerpoint/2010/main" val="2687924095"/>
+      </p:ext>
+    </p:extLst>
+  </p:cSld>
+  <p:clrMapOvr>
+    <a:masterClrMapping/>
+  </p:clrMapOvr>
+</p:sld>
+</file>
+
+<file path=ppt/slides/slide2.xml><?xml version="1.0" encoding="utf-8"?>
+<p:sld xmlns:a="http://schemas.openxmlformats.org/drawingml/2006/main" xmlns:r="http://schemas.openxmlformats.org/officeDocument/2006/relationships" xmlns:p="http://schemas.openxmlformats.org/presentationml/2006/main">
+  <p:cSld>
+    <p:spTree>
+      <p:nvGrpSpPr>
+        <p:cNvPr id="1" name=""/>
+        <p:cNvGrpSpPr/>
+        <p:nvPr/>
+      </p:nvGrpSpPr>
+      <p:grpSpPr>
+        <a:xfrm>
+          <a:off x="0" y="0"/>
+          <a:ext cx="0" cy="0"/>
+          <a:chOff x="0" y="0"/>
+          <a:chExt cx="0" cy="0"/>
+        </a:xfrm>
+      </p:grpSpPr>
+      <p:sp>
+        <p:nvSpPr>
+          <p:cNvPr id="3" name="Content Placeholder 2">
+            <a:extLst>
+              <a:ext uri="{FF2B5EF4-FFF2-40B4-BE49-F238E27FC236}">
+                <a16:creationId xmlns:a16="http://schemas.microsoft.com/office/drawing/2014/main" id="{510F6C65-586B-5F89-7660-E9951CD60E63}"/>
+              </a:ext>
+            </a:extLst>
+          </p:cNvPr>
+          <p:cNvSpPr>
+            <a:spLocks noGrp="1"/>
+          </p:cNvSpPr>
+          <p:nvPr>
+            <p:ph idx="1"/>
+          </p:nvPr>
+        </p:nvSpPr>
+        <p:spPr>
+          <a:xfrm>
+            <a:off x="838200" y="1253331"/>
+            <a:ext cx="10515600" cy="4351338"/>
+          </a:xfrm>
+        </p:spPr>
+        <p:txBody>
+          <a:bodyPr>
+            <a:normAutofit/>
+          </a:bodyPr>
+          <a:lstStyle/>
+          <a:p>
+            <a:pPr marL="514350" indent="-514350">
+              <a:buFont typeface="+mj-lt"/>
+              <a:buAutoNum type="arabicPeriod"/>
+            </a:pPr>
+            <a:r>
+              <a:rPr lang="en-US" dirty="0"/>
+              <a:t>Install </a:t>
+            </a:r>
+            <a:r>
+              <a:rPr lang="en-US" dirty="0" err="1"/>
+              <a:t>ComplexHeatmap</a:t>
+            </a:r>
+            <a:r>
+              <a:rPr lang="en-US" dirty="0"/>
+              <a:t> using the following code:</a:t>
+            </a:r>
+          </a:p>
+          <a:p>
+            <a:pPr marL="457200" lvl="1" indent="0">
+              <a:buNone/>
+            </a:pPr>
+            <a:r>
+              <a:rPr lang="en-US" dirty="0">
+                <a:highlight>
+                  <a:srgbClr val="FFFF00"/>
+                </a:highlight>
+              </a:rPr>
+              <a:t>if (!</a:t>
+            </a:r>
+            <a:r>
+              <a:rPr lang="en-US" dirty="0" err="1">
+                <a:highlight>
+                  <a:srgbClr val="FFFF00"/>
+                </a:highlight>
+              </a:rPr>
+              <a:t>requireNamespace</a:t>
+            </a:r>
+            <a:r>
+              <a:rPr lang="en-US" dirty="0">
+                <a:highlight>
+                  <a:srgbClr val="FFFF00"/>
+                </a:highlight>
+              </a:rPr>
+              <a:t>("</a:t>
+            </a:r>
+            <a:r>
+              <a:rPr lang="en-US" dirty="0" err="1">
+                <a:highlight>
+                  <a:srgbClr val="FFFF00"/>
+                </a:highlight>
+              </a:rPr>
+              <a:t>BiocManager</a:t>
+            </a:r>
+            <a:r>
+              <a:rPr lang="en-US" dirty="0">
+                <a:highlight>
+                  <a:srgbClr val="FFFF00"/>
+                </a:highlight>
+              </a:rPr>
+              <a:t>", quietly = TRUE)) </a:t>
+            </a:r>
+            <a:r>
+              <a:rPr lang="en-US" dirty="0" err="1">
+                <a:highlight>
+                  <a:srgbClr val="FFFF00"/>
+                </a:highlight>
+              </a:rPr>
+              <a:t>install.packages</a:t>
+            </a:r>
+            <a:r>
+              <a:rPr lang="en-US" dirty="0">
+                <a:highlight>
+                  <a:srgbClr val="FFFF00"/>
+                </a:highlight>
+              </a:rPr>
+              <a:t>("</a:t>
+            </a:r>
+            <a:r>
+              <a:rPr lang="en-US" dirty="0" err="1">
+                <a:highlight>
+                  <a:srgbClr val="FFFF00"/>
+                </a:highlight>
+              </a:rPr>
+              <a:t>BiocManager</a:t>
+            </a:r>
+            <a:r>
+              <a:rPr lang="en-US" dirty="0">
+                <a:highlight>
+                  <a:srgbClr val="FFFF00"/>
+                </a:highlight>
+              </a:rPr>
+              <a:t>")</a:t>
+            </a:r>
+          </a:p>
+          <a:p>
+            <a:pPr marL="457200" lvl="1" indent="0">
+              <a:buNone/>
+            </a:pPr>
+            <a:r>
+              <a:rPr lang="en-US" dirty="0" err="1">
+                <a:highlight>
+                  <a:srgbClr val="FFFF00"/>
+                </a:highlight>
+              </a:rPr>
+              <a:t>BiocManager</a:t>
+            </a:r>
+            <a:r>
+              <a:rPr lang="en-US" dirty="0">
+                <a:highlight>
+                  <a:srgbClr val="FFFF00"/>
+                </a:highlight>
+              </a:rPr>
+              <a:t>::install(c("</a:t>
+            </a:r>
+            <a:r>
+              <a:rPr lang="en-US" dirty="0" err="1">
+                <a:highlight>
+                  <a:srgbClr val="FFFF00"/>
+                </a:highlight>
+              </a:rPr>
+              <a:t>ComplexHeatmap</a:t>
+            </a:r>
+            <a:r>
+              <a:rPr lang="en-US" dirty="0">
+                <a:highlight>
+                  <a:srgbClr val="FFFF00"/>
+                </a:highlight>
+              </a:rPr>
+              <a:t>”)</a:t>
+            </a:r>
+          </a:p>
+          <a:p>
+            <a:pPr marL="514350" indent="-514350">
+              <a:buFont typeface="+mj-lt"/>
+              <a:buAutoNum type="arabicPeriod"/>
+            </a:pPr>
+            <a:r>
+              <a:rPr lang="en-US" dirty="0"/>
+              <a:t>Open </a:t>
+            </a:r>
+            <a:r>
+              <a:rPr lang="en-US" dirty="0" err="1"/>
+              <a:t>runModac.Rproj</a:t>
+            </a:r>
+            <a:endParaRPr lang="en-US" dirty="0"/>
+          </a:p>
+          <a:p>
+            <a:pPr marL="514350" indent="-514350">
+              <a:buFont typeface="+mj-lt"/>
+              <a:buAutoNum type="arabicPeriod"/>
+            </a:pPr>
+            <a:r>
+              <a:rPr lang="en-US" dirty="0"/>
+              <a:t>Source the “R/</a:t>
+            </a:r>
+            <a:r>
+              <a:rPr lang="en-US" dirty="0" err="1"/>
+              <a:t>runModac.R</a:t>
+            </a:r>
+            <a:r>
+              <a:rPr lang="en-US" dirty="0"/>
+              <a:t>” file and proceed with analysis</a:t>
+            </a:r>
+          </a:p>
+          <a:p>
+            <a:pPr marL="514350" indent="-514350">
+              <a:buFont typeface="+mj-lt"/>
+              <a:buAutoNum type="arabicPeriod"/>
+            </a:pPr>
+            <a:endParaRPr lang="en-US" dirty="0"/>
+          </a:p>
+          <a:p>
+            <a:pPr marL="514350" indent="-514350">
+              <a:buFont typeface="+mj-lt"/>
+              <a:buAutoNum type="arabicPeriod"/>
+            </a:pPr>
+            <a:endParaRPr lang="en-US" dirty="0"/>
+          </a:p>
+        </p:txBody>
+      </p:sp>
+      <p:sp>
+        <p:nvSpPr>
+          <p:cNvPr id="4" name="Title 1">
+            <a:extLst>
+              <a:ext uri="{FF2B5EF4-FFF2-40B4-BE49-F238E27FC236}">
+                <a16:creationId xmlns:a16="http://schemas.microsoft.com/office/drawing/2014/main" id="{1698327C-A5D0-FC32-FF96-831F06359282}"/>
+              </a:ext>
+            </a:extLst>
+          </p:cNvPr>
+          <p:cNvSpPr txBox="1">
+            <a:spLocks/>
+          </p:cNvSpPr>
+          <p:nvPr/>
+        </p:nvSpPr>
+        <p:spPr>
+          <a:xfrm>
+            <a:off x="838200" y="5896"/>
+            <a:ext cx="10515600" cy="962933"/>
+          </a:xfrm>
+          <a:prstGeom prst="rect">
+            <a:avLst/>
+          </a:prstGeom>
+        </p:spPr>
+        <p:txBody>
+          <a:bodyPr vert="horz" lIns="91440" tIns="45720" rIns="91440" bIns="45720" rtlCol="0" anchor="ctr">
+            <a:normAutofit/>
+          </a:bodyPr>
+          <a:lstStyle>
+            <a:lvl1pPr algn="l" defTabSz="914400" rtl="0" eaLnBrk="1" latinLnBrk="0" hangingPunct="1">
+              <a:lnSpc>
+                <a:spcPct val="90000"/>
+              </a:lnSpc>
+              <a:spcBef>
+                <a:spcPct val="0"/>
+              </a:spcBef>
+              <a:buNone/>
+              <a:defRPr sz="4400" kern="1200">
+                <a:solidFill>
+                  <a:schemeClr val="tx1"/>
+                </a:solidFill>
+                <a:latin typeface="+mj-lt"/>
+                <a:ea typeface="+mj-ea"/>
+                <a:cs typeface="+mj-cs"/>
+              </a:defRPr>
+            </a:lvl1pPr>
+          </a:lstStyle>
+          <a:p>
+            <a:pPr algn="ctr"/>
+            <a:r>
+              <a:rPr lang="en-US" dirty="0"/>
+              <a:t>Prep</a:t>
+            </a:r>
+          </a:p>
+        </p:txBody>
+      </p:sp>
+    </p:spTree>
+    <p:extLst>
+      <p:ext uri="{BB962C8B-B14F-4D97-AF65-F5344CB8AC3E}">
+        <p14:creationId xmlns:p14="http://schemas.microsoft.com/office/powerpoint/2010/main" val="2800028702"/>
+      </p:ext>
+    </p:extLst>
+  </p:cSld>
+  <p:clrMapOvr>
+    <a:masterClrMapping/>
+  </p:clrMapOvr>
+</p:sld>
+</file>
+
+<file path=ppt/slides/slide20.xml><?xml version="1.0" encoding="utf-8"?>
+<p:sld xmlns:a="http://schemas.openxmlformats.org/drawingml/2006/main" xmlns:r="http://schemas.openxmlformats.org/officeDocument/2006/relationships" xmlns:p="http://schemas.openxmlformats.org/presentationml/2006/main">
+  <p:cSld>
+    <p:spTree>
+      <p:nvGrpSpPr>
+        <p:cNvPr id="1" name=""/>
+        <p:cNvGrpSpPr/>
+        <p:nvPr/>
+      </p:nvGrpSpPr>
+      <p:grpSpPr>
+        <a:xfrm>
+          <a:off x="0" y="0"/>
+          <a:ext cx="0" cy="0"/>
+          <a:chOff x="0" y="0"/>
+          <a:chExt cx="0" cy="0"/>
+        </a:xfrm>
+      </p:grpSpPr>
+      <p:sp>
+        <p:nvSpPr>
+          <p:cNvPr id="2" name="Title 1">
+            <a:extLst>
+              <a:ext uri="{FF2B5EF4-FFF2-40B4-BE49-F238E27FC236}">
+                <a16:creationId xmlns:a16="http://schemas.microsoft.com/office/drawing/2014/main" id="{7F0B5931-2EE9-5ED4-D771-2F12E9BB97E4}"/>
+              </a:ext>
+            </a:extLst>
+          </p:cNvPr>
+          <p:cNvSpPr>
+            <a:spLocks noGrp="1"/>
+          </p:cNvSpPr>
+          <p:nvPr>
+            <p:ph type="title"/>
+          </p:nvPr>
+        </p:nvSpPr>
+        <p:spPr>
+          <a:xfrm>
+            <a:off x="838200" y="5896"/>
+            <a:ext cx="10515600" cy="962933"/>
+          </a:xfrm>
+        </p:spPr>
+        <p:txBody>
+          <a:bodyPr/>
+          <a:lstStyle/>
+          <a:p>
+            <a:pPr algn="ctr"/>
+            <a:r>
+              <a:rPr lang="en-US" dirty="0"/>
+              <a:t>Code</a:t>
+            </a:r>
+          </a:p>
+        </p:txBody>
+      </p:sp>
+      <p:sp>
+        <p:nvSpPr>
+          <p:cNvPr id="5" name="TextBox 4">
+            <a:extLst>
+              <a:ext uri="{FF2B5EF4-FFF2-40B4-BE49-F238E27FC236}">
+                <a16:creationId xmlns:a16="http://schemas.microsoft.com/office/drawing/2014/main" id="{F288E7ED-94CF-4842-85C0-A28FF97F6638}"/>
+              </a:ext>
+            </a:extLst>
+          </p:cNvPr>
+          <p:cNvSpPr txBox="1"/>
+          <p:nvPr/>
+        </p:nvSpPr>
+        <p:spPr>
+          <a:xfrm>
+            <a:off x="5660020" y="968829"/>
+            <a:ext cx="6531980" cy="5909310"/>
+          </a:xfrm>
+          <a:prstGeom prst="rect">
+            <a:avLst/>
+          </a:prstGeom>
+          <a:noFill/>
+        </p:spPr>
+        <p:txBody>
+          <a:bodyPr wrap="square">
+            <a:spAutoFit/>
+          </a:bodyPr>
+          <a:lstStyle/>
+          <a:p>
+            <a:pPr marL="285750" indent="-285750">
+              <a:buFont typeface="Arial" panose="020B0604020202020204" pitchFamily="34" charset="0"/>
+              <a:buChar char="•"/>
+            </a:pPr>
+            <a:r>
+              <a:rPr lang="en-US" b="1" dirty="0" err="1"/>
+              <a:t>inputFile</a:t>
+            </a:r>
+            <a:r>
+              <a:rPr lang="en-US" dirty="0"/>
+              <a:t>: path to the input file.</a:t>
+            </a:r>
+            <a:endParaRPr lang="en-US" b="1" dirty="0"/>
+          </a:p>
+          <a:p>
+            <a:pPr marL="285750" indent="-285750">
+              <a:buFont typeface="Arial" panose="020B0604020202020204" pitchFamily="34" charset="0"/>
+              <a:buChar char="•"/>
+            </a:pPr>
+            <a:r>
+              <a:rPr lang="en-US" b="1" dirty="0" err="1"/>
+              <a:t>comparisonsFile</a:t>
+            </a:r>
+            <a:r>
+              <a:rPr lang="en-US" dirty="0"/>
+              <a:t>: path to the comparisons file.</a:t>
+            </a:r>
+            <a:endParaRPr lang="en-US" b="1" dirty="0"/>
+          </a:p>
+          <a:p>
+            <a:pPr marL="285750" indent="-285750">
+              <a:buFont typeface="Arial" panose="020B0604020202020204" pitchFamily="34" charset="0"/>
+              <a:buChar char="•"/>
+            </a:pPr>
+            <a:r>
+              <a:rPr lang="en-US" b="1" dirty="0"/>
+              <a:t>type</a:t>
+            </a:r>
+            <a:r>
+              <a:rPr lang="en-US" dirty="0"/>
+              <a:t>: “metabolomics”, “</a:t>
+            </a:r>
+            <a:r>
+              <a:rPr lang="en-US" dirty="0" err="1"/>
+              <a:t>rppa</a:t>
+            </a:r>
+            <a:r>
+              <a:rPr lang="en-US" dirty="0"/>
+              <a:t>”, or “none”. Use “none” for </a:t>
+            </a:r>
+            <a:r>
+              <a:rPr lang="en-US" dirty="0" err="1"/>
+              <a:t>prenormalized</a:t>
+            </a:r>
+            <a:r>
+              <a:rPr lang="en-US" dirty="0"/>
+              <a:t> data.</a:t>
+            </a:r>
+            <a:endParaRPr lang="en-US" b="1" dirty="0"/>
+          </a:p>
+          <a:p>
+            <a:pPr marL="285750" indent="-285750">
+              <a:buFont typeface="Arial" panose="020B0604020202020204" pitchFamily="34" charset="0"/>
+              <a:buChar char="•"/>
+            </a:pPr>
+            <a:r>
+              <a:rPr lang="en-US" b="1" dirty="0" err="1"/>
+              <a:t>outdir</a:t>
+            </a:r>
+            <a:r>
+              <a:rPr lang="en-US" dirty="0"/>
+              <a:t>: path to output directory. Default is “results” folder in current directory.</a:t>
+            </a:r>
+            <a:endParaRPr lang="en-US" b="1" dirty="0"/>
+          </a:p>
+          <a:p>
+            <a:pPr marL="285750" indent="-285750">
+              <a:buFont typeface="Arial" panose="020B0604020202020204" pitchFamily="34" charset="0"/>
+              <a:buChar char="•"/>
+            </a:pPr>
+            <a:r>
+              <a:rPr lang="en-US" b="1" dirty="0" err="1"/>
+              <a:t>project_title</a:t>
+            </a:r>
+            <a:r>
+              <a:rPr lang="en-US" dirty="0"/>
+              <a:t>: project title to be used in the summary pptx. Default is “Report”.</a:t>
+            </a:r>
+            <a:endParaRPr lang="en-US" b="1" dirty="0"/>
+          </a:p>
+          <a:p>
+            <a:pPr marL="285750" indent="-285750">
+              <a:buFont typeface="Arial" panose="020B0604020202020204" pitchFamily="34" charset="0"/>
+              <a:buChar char="•"/>
+            </a:pPr>
+            <a:r>
+              <a:rPr lang="en-US" b="1" dirty="0" err="1"/>
+              <a:t>project_subtitle</a:t>
+            </a:r>
+            <a:r>
+              <a:rPr lang="en-US" dirty="0"/>
+              <a:t>: project subtitle to be used in the summary pptx. Default is “by”.</a:t>
+            </a:r>
+          </a:p>
+          <a:p>
+            <a:pPr marL="285750" indent="-285750">
+              <a:buFont typeface="Arial" panose="020B0604020202020204" pitchFamily="34" charset="0"/>
+              <a:buChar char="•"/>
+            </a:pPr>
+            <a:r>
+              <a:rPr lang="en-US" b="1" dirty="0" err="1"/>
+              <a:t>heatmap_color_scale</a:t>
+            </a:r>
+            <a:r>
+              <a:rPr lang="en-US" b="1" dirty="0"/>
+              <a:t>: </a:t>
+            </a:r>
+            <a:r>
+              <a:rPr lang="en-US" dirty="0"/>
+              <a:t>specify 3 colors to use for heatmap color scale. Default is c("blue", "black", "yellow").</a:t>
+            </a:r>
+          </a:p>
+          <a:p>
+            <a:pPr marL="285750" indent="-285750">
+              <a:buFont typeface="Arial" panose="020B0604020202020204" pitchFamily="34" charset="0"/>
+              <a:buChar char="•"/>
+            </a:pPr>
+            <a:r>
+              <a:rPr lang="en-US" b="1" dirty="0" err="1"/>
+              <a:t>samplesAreRows</a:t>
+            </a:r>
+            <a:r>
+              <a:rPr lang="en-US" b="1" dirty="0"/>
+              <a:t>: </a:t>
+            </a:r>
+            <a:r>
+              <a:rPr lang="en-US" dirty="0"/>
+              <a:t>TRUE or FALSE. Is the input data in the form of rows of samples? Default is TRUE.</a:t>
+            </a:r>
+          </a:p>
+          <a:p>
+            <a:pPr marL="285750" indent="-285750">
+              <a:buFont typeface="Arial" panose="020B0604020202020204" pitchFamily="34" charset="0"/>
+              <a:buChar char="•"/>
+            </a:pPr>
+            <a:r>
+              <a:rPr lang="en-US" b="1" dirty="0" err="1"/>
+              <a:t>sampleIDRow</a:t>
+            </a:r>
+            <a:r>
+              <a:rPr lang="en-US" b="1" dirty="0"/>
+              <a:t>: </a:t>
+            </a:r>
+            <a:r>
+              <a:rPr lang="en-US" dirty="0"/>
+              <a:t>1 or 2.</a:t>
+            </a:r>
+            <a:r>
+              <a:rPr lang="en-US" b="1" dirty="0"/>
+              <a:t> </a:t>
+            </a:r>
+            <a:r>
+              <a:rPr lang="en-US" dirty="0"/>
+              <a:t>Only for RPPA analysis. Which row of the normalized RPPA data are the Sample IDs present in? Default is 2.</a:t>
+            </a:r>
+          </a:p>
+          <a:p>
+            <a:pPr marL="285750" indent="-285750">
+              <a:buFont typeface="Arial" panose="020B0604020202020204" pitchFamily="34" charset="0"/>
+              <a:buChar char="•"/>
+            </a:pPr>
+            <a:r>
+              <a:rPr lang="en-US" b="1" dirty="0" err="1"/>
+              <a:t>min_signal</a:t>
+            </a:r>
+            <a:r>
+              <a:rPr lang="en-US" b="1" dirty="0"/>
+              <a:t>: </a:t>
+            </a:r>
+            <a:r>
+              <a:rPr lang="en-US" dirty="0"/>
+              <a:t>for each comparison, filtering out features for which none of the samples have signal &gt; </a:t>
+            </a:r>
+            <a:r>
+              <a:rPr lang="en-US" dirty="0" err="1"/>
+              <a:t>min_signal</a:t>
+            </a:r>
+            <a:r>
+              <a:rPr lang="en-US" dirty="0"/>
+              <a:t>. Setting to NULL turns this filter off. Default is NULL.</a:t>
+            </a:r>
+            <a:endParaRPr lang="en-US" b="1" dirty="0"/>
+          </a:p>
+          <a:p>
+            <a:pPr marL="285750" indent="-285750">
+              <a:buFont typeface="Arial" panose="020B0604020202020204" pitchFamily="34" charset="0"/>
+              <a:buChar char="•"/>
+            </a:pPr>
+            <a:r>
+              <a:rPr lang="en-US" b="1" dirty="0" err="1"/>
+              <a:t>scriptPath</a:t>
+            </a:r>
+            <a:r>
+              <a:rPr lang="en-US" dirty="0"/>
+              <a:t>: path to R folder within the </a:t>
+            </a:r>
+            <a:r>
+              <a:rPr lang="en-US" dirty="0" err="1"/>
+              <a:t>runMODAC</a:t>
+            </a:r>
+            <a:r>
+              <a:rPr lang="en-US" dirty="0"/>
+              <a:t> folder on your system.</a:t>
+            </a:r>
+            <a:endParaRPr lang="en-US" b="1" dirty="0"/>
+          </a:p>
+        </p:txBody>
+      </p:sp>
+      <p:pic>
+        <p:nvPicPr>
+          <p:cNvPr id="6" name="Picture 5">
+            <a:extLst>
+              <a:ext uri="{FF2B5EF4-FFF2-40B4-BE49-F238E27FC236}">
+                <a16:creationId xmlns:a16="http://schemas.microsoft.com/office/drawing/2014/main" id="{080D0802-548A-1847-122B-766B0AAE49AC}"/>
+              </a:ext>
+            </a:extLst>
+          </p:cNvPr>
+          <p:cNvPicPr>
+            <a:picLocks noChangeAspect="1"/>
+          </p:cNvPicPr>
+          <p:nvPr/>
+        </p:nvPicPr>
+        <p:blipFill>
+          <a:blip r:embed="rId2"/>
+          <a:stretch>
+            <a:fillRect/>
+          </a:stretch>
+        </p:blipFill>
+        <p:spPr>
+          <a:xfrm>
+            <a:off x="0" y="2346627"/>
+            <a:ext cx="5660020" cy="2164746"/>
+          </a:xfrm>
+          <a:prstGeom prst="rect">
+            <a:avLst/>
+          </a:prstGeom>
+        </p:spPr>
+      </p:pic>
+    </p:spTree>
+    <p:extLst>
+      <p:ext uri="{BB962C8B-B14F-4D97-AF65-F5344CB8AC3E}">
+        <p14:creationId xmlns:p14="http://schemas.microsoft.com/office/powerpoint/2010/main" val="1027841073"/>
+      </p:ext>
+    </p:extLst>
+  </p:cSld>
+  <p:clrMapOvr>
+    <a:masterClrMapping/>
+  </p:clrMapOvr>
+</p:sld>
+</file>
+
+<file path=ppt/slides/slide21.xml><?xml version="1.0" encoding="utf-8"?>
+<p:sld xmlns:a="http://schemas.openxmlformats.org/drawingml/2006/main" xmlns:r="http://schemas.openxmlformats.org/officeDocument/2006/relationships" xmlns:p="http://schemas.openxmlformats.org/presentationml/2006/main">
+  <p:cSld>
+    <p:spTree>
+      <p:nvGrpSpPr>
+        <p:cNvPr id="1" name=""/>
+        <p:cNvGrpSpPr/>
+        <p:nvPr/>
+      </p:nvGrpSpPr>
+      <p:grpSpPr>
+        <a:xfrm>
+          <a:off x="0" y="0"/>
+          <a:ext cx="0" cy="0"/>
+          <a:chOff x="0" y="0"/>
+          <a:chExt cx="0" cy="0"/>
+        </a:xfrm>
+      </p:grpSpPr>
+      <p:sp>
+        <p:nvSpPr>
+          <p:cNvPr id="2" name="Title 1">
+            <a:extLst>
+              <a:ext uri="{FF2B5EF4-FFF2-40B4-BE49-F238E27FC236}">
+                <a16:creationId xmlns:a16="http://schemas.microsoft.com/office/drawing/2014/main" id="{7F0B5931-2EE9-5ED4-D771-2F12E9BB97E4}"/>
+              </a:ext>
+            </a:extLst>
+          </p:cNvPr>
+          <p:cNvSpPr>
+            <a:spLocks noGrp="1"/>
+          </p:cNvSpPr>
+          <p:nvPr>
+            <p:ph type="title"/>
+          </p:nvPr>
+        </p:nvSpPr>
+        <p:spPr>
+          <a:xfrm>
+            <a:off x="838200" y="5896"/>
+            <a:ext cx="10515600" cy="962933"/>
+          </a:xfrm>
+        </p:spPr>
+        <p:txBody>
+          <a:bodyPr/>
+          <a:lstStyle/>
+          <a:p>
+            <a:pPr algn="ctr"/>
+            <a:r>
+              <a:rPr lang="en-US" dirty="0"/>
+              <a:t>Results</a:t>
+            </a:r>
+          </a:p>
+        </p:txBody>
+      </p:sp>
+      <p:sp>
+        <p:nvSpPr>
+          <p:cNvPr id="8" name="TextBox 7">
+            <a:extLst>
+              <a:ext uri="{FF2B5EF4-FFF2-40B4-BE49-F238E27FC236}">
+                <a16:creationId xmlns:a16="http://schemas.microsoft.com/office/drawing/2014/main" id="{1355883A-5E59-3E22-F4B3-09651AA388E1}"/>
+              </a:ext>
+            </a:extLst>
+          </p:cNvPr>
+          <p:cNvSpPr txBox="1"/>
+          <p:nvPr/>
+        </p:nvSpPr>
+        <p:spPr>
+          <a:xfrm>
+            <a:off x="3668486" y="1720840"/>
+            <a:ext cx="8523514" cy="4247317"/>
+          </a:xfrm>
+          <a:prstGeom prst="rect">
+            <a:avLst/>
+          </a:prstGeom>
+          <a:noFill/>
+        </p:spPr>
+        <p:txBody>
+          <a:bodyPr wrap="square" rtlCol="0">
+            <a:spAutoFit/>
+          </a:bodyPr>
+          <a:lstStyle/>
+          <a:p>
+            <a:pPr marL="285750" indent="-285750">
+              <a:buFont typeface="Arial" panose="020B0604020202020204" pitchFamily="34" charset="0"/>
+              <a:buChar char="•"/>
+            </a:pPr>
+            <a:r>
+              <a:rPr lang="en-US" b="1" dirty="0"/>
+              <a:t>heatmaps</a:t>
+            </a:r>
+            <a:r>
+              <a:rPr lang="en-US" dirty="0"/>
+              <a:t>: folder containing heatmaps in .jpg and .pdf format with supporting data used to generate the heatmap available in a .csv file.</a:t>
+            </a:r>
+          </a:p>
+          <a:p>
+            <a:pPr marL="285750" indent="-285750">
+              <a:buFont typeface="Arial" panose="020B0604020202020204" pitchFamily="34" charset="0"/>
+              <a:buChar char="•"/>
+            </a:pPr>
+            <a:r>
+              <a:rPr lang="en-US" b="1" dirty="0" err="1"/>
+              <a:t>pca</a:t>
+            </a:r>
+            <a:r>
+              <a:rPr lang="en-US" dirty="0"/>
+              <a:t>: folder containing </a:t>
+            </a:r>
+            <a:r>
+              <a:rPr lang="en-US" dirty="0" err="1"/>
+              <a:t>pca</a:t>
+            </a:r>
+            <a:r>
+              <a:rPr lang="en-US" dirty="0"/>
+              <a:t> plots in .jpg and .pdf format with supporting data used to generate the </a:t>
+            </a:r>
+            <a:r>
+              <a:rPr lang="en-US" dirty="0" err="1"/>
+              <a:t>pca</a:t>
+            </a:r>
+            <a:r>
+              <a:rPr lang="en-US" dirty="0"/>
+              <a:t> plots available in a .xlsx file.</a:t>
+            </a:r>
+          </a:p>
+          <a:p>
+            <a:pPr marL="285750" indent="-285750">
+              <a:buFont typeface="Arial" panose="020B0604020202020204" pitchFamily="34" charset="0"/>
+              <a:buChar char="•"/>
+            </a:pPr>
+            <a:r>
+              <a:rPr lang="en-US" b="1" dirty="0" err="1"/>
+              <a:t>QA_plots</a:t>
+            </a:r>
+            <a:r>
+              <a:rPr lang="en-US" dirty="0"/>
+              <a:t>: folder containing boxplots of the combined normalized data and normalized data per method as well as internal standard distribution and QC samples distribution plot per method.</a:t>
+            </a:r>
+          </a:p>
+          <a:p>
+            <a:pPr marL="285750" indent="-285750">
+              <a:buFont typeface="Arial" panose="020B0604020202020204" pitchFamily="34" charset="0"/>
+              <a:buChar char="•"/>
+            </a:pPr>
+            <a:r>
+              <a:rPr lang="en-US" b="1" dirty="0"/>
+              <a:t>report</a:t>
+            </a:r>
+            <a:r>
+              <a:rPr lang="en-US" dirty="0"/>
+              <a:t>: folder containing raw combined data, normalized data, and for each comparison, boxplots of all features and statistical test report files.</a:t>
+            </a:r>
+          </a:p>
+          <a:p>
+            <a:pPr marL="285750" indent="-285750">
+              <a:buFont typeface="Arial" panose="020B0604020202020204" pitchFamily="34" charset="0"/>
+              <a:buChar char="•"/>
+            </a:pPr>
+            <a:r>
+              <a:rPr lang="en-US" b="1" dirty="0" err="1"/>
+              <a:t>report.pptx</a:t>
+            </a:r>
+            <a:r>
+              <a:rPr lang="en-US" dirty="0"/>
+              <a:t>: presentation containing a summary of the results.</a:t>
+            </a:r>
+            <a:endParaRPr lang="en-US" b="1" dirty="0"/>
+          </a:p>
+          <a:p>
+            <a:pPr marL="285750" indent="-285750">
+              <a:buFont typeface="Arial" panose="020B0604020202020204" pitchFamily="34" charset="0"/>
+              <a:buChar char="•"/>
+            </a:pPr>
+            <a:r>
+              <a:rPr lang="en-US" b="1" dirty="0" err="1"/>
+              <a:t>Rnk</a:t>
+            </a:r>
+            <a:r>
+              <a:rPr lang="en-US" dirty="0"/>
+              <a:t>: folder containing the rank files for each comparison.</a:t>
+            </a:r>
+            <a:endParaRPr lang="en-US" b="1" dirty="0"/>
+          </a:p>
+          <a:p>
+            <a:pPr marL="285750" indent="-285750">
+              <a:buFont typeface="Arial" panose="020B0604020202020204" pitchFamily="34" charset="0"/>
+              <a:buChar char="•"/>
+            </a:pPr>
+            <a:r>
+              <a:rPr lang="en-US" b="1" dirty="0" err="1"/>
+              <a:t>sessionInfo.txt</a:t>
+            </a:r>
+            <a:r>
+              <a:rPr lang="en-US" b="1" dirty="0"/>
+              <a:t>: </a:t>
+            </a:r>
+            <a:r>
+              <a:rPr lang="en-US" dirty="0"/>
+              <a:t>text file containing your R session information.</a:t>
+            </a:r>
+            <a:endParaRPr lang="en-US" b="1" dirty="0"/>
+          </a:p>
+          <a:p>
+            <a:pPr marL="285750" indent="-285750">
+              <a:buFont typeface="Arial" panose="020B0604020202020204" pitchFamily="34" charset="0"/>
+              <a:buChar char="•"/>
+            </a:pPr>
+            <a:r>
+              <a:rPr lang="en-US" b="1" dirty="0"/>
+              <a:t>Signature</a:t>
+            </a:r>
+            <a:r>
+              <a:rPr lang="en-US" dirty="0"/>
+              <a:t>: folder containing the signature files for each comparison.</a:t>
+            </a:r>
+          </a:p>
+          <a:p>
+            <a:pPr marL="285750" indent="-285750">
+              <a:buFont typeface="Arial" panose="020B0604020202020204" pitchFamily="34" charset="0"/>
+              <a:buChar char="•"/>
+            </a:pPr>
+            <a:r>
+              <a:rPr lang="en-US" b="1" dirty="0" err="1"/>
+              <a:t>volcano_plots</a:t>
+            </a:r>
+            <a:r>
+              <a:rPr lang="en-US" b="1" dirty="0"/>
+              <a:t>: </a:t>
+            </a:r>
+            <a:r>
+              <a:rPr lang="en-US" dirty="0"/>
+              <a:t>folder containing volcano plots for each t-test comparison in .jpg and .pdf format.</a:t>
+            </a:r>
+            <a:endParaRPr lang="en-US" b="1" dirty="0"/>
+          </a:p>
+        </p:txBody>
+      </p:sp>
+      <p:pic>
+        <p:nvPicPr>
+          <p:cNvPr id="3" name="Picture 2">
+            <a:extLst>
+              <a:ext uri="{FF2B5EF4-FFF2-40B4-BE49-F238E27FC236}">
+                <a16:creationId xmlns:a16="http://schemas.microsoft.com/office/drawing/2014/main" id="{47314DDE-9CEE-6127-BA9D-BF8C5A1054EA}"/>
+              </a:ext>
+            </a:extLst>
+          </p:cNvPr>
+          <p:cNvPicPr>
+            <a:picLocks noChangeAspect="1"/>
+          </p:cNvPicPr>
+          <p:nvPr/>
+        </p:nvPicPr>
+        <p:blipFill rotWithShape="1">
+          <a:blip r:embed="rId2"/>
+          <a:srcRect t="9416"/>
+          <a:stretch/>
+        </p:blipFill>
+        <p:spPr>
+          <a:xfrm>
+            <a:off x="0" y="1616371"/>
+            <a:ext cx="3665008" cy="4456254"/>
+          </a:xfrm>
+          <a:prstGeom prst="rect">
+            <a:avLst/>
+          </a:prstGeom>
+        </p:spPr>
+      </p:pic>
+    </p:spTree>
+    <p:extLst>
+      <p:ext uri="{BB962C8B-B14F-4D97-AF65-F5344CB8AC3E}">
+        <p14:creationId xmlns:p14="http://schemas.microsoft.com/office/powerpoint/2010/main" val="4290605502"/>
+      </p:ext>
+    </p:extLst>
+  </p:cSld>
+  <p:clrMapOvr>
+    <a:masterClrMapping/>
+  </p:clrMapOvr>
+</p:sld>
+</file>
+
+<file path=ppt/slides/slide22.xml><?xml version="1.0" encoding="utf-8"?>
 <p:sld xmlns:a="http://schemas.openxmlformats.org/drawingml/2006/main" xmlns:r="http://schemas.openxmlformats.org/officeDocument/2006/relationships" xmlns:p="http://schemas.openxmlformats.org/presentationml/2006/main" show="0">
   <p:cSld>
     <p:spTree>
@@ -5087,299 +6698,6 @@
 </p:sld>
 </file>
 
-<file path=ppt/slides/slide2.xml><?xml version="1.0" encoding="utf-8"?>
-<p:sld xmlns:a="http://schemas.openxmlformats.org/drawingml/2006/main" xmlns:r="http://schemas.openxmlformats.org/officeDocument/2006/relationships" xmlns:p="http://schemas.openxmlformats.org/presentationml/2006/main">
-  <p:cSld>
-    <p:spTree>
-      <p:nvGrpSpPr>
-        <p:cNvPr id="1" name=""/>
-        <p:cNvGrpSpPr/>
-        <p:nvPr/>
-      </p:nvGrpSpPr>
-      <p:grpSpPr>
-        <a:xfrm>
-          <a:off x="0" y="0"/>
-          <a:ext cx="0" cy="0"/>
-          <a:chOff x="0" y="0"/>
-          <a:chExt cx="0" cy="0"/>
-        </a:xfrm>
-      </p:grpSpPr>
-      <p:sp>
-        <p:nvSpPr>
-          <p:cNvPr id="3" name="Content Placeholder 2">
-            <a:extLst>
-              <a:ext uri="{FF2B5EF4-FFF2-40B4-BE49-F238E27FC236}">
-                <a16:creationId xmlns:a16="http://schemas.microsoft.com/office/drawing/2014/main" id="{510F6C65-586B-5F89-7660-E9951CD60E63}"/>
-              </a:ext>
-            </a:extLst>
-          </p:cNvPr>
-          <p:cNvSpPr>
-            <a:spLocks noGrp="1"/>
-          </p:cNvSpPr>
-          <p:nvPr>
-            <p:ph idx="1"/>
-          </p:nvPr>
-        </p:nvSpPr>
-        <p:spPr>
-          <a:xfrm>
-            <a:off x="838200" y="1253331"/>
-            <a:ext cx="10515600" cy="4351338"/>
-          </a:xfrm>
-        </p:spPr>
-        <p:txBody>
-          <a:bodyPr>
-            <a:normAutofit/>
-          </a:bodyPr>
-          <a:lstStyle/>
-          <a:p>
-            <a:pPr marL="514350" indent="-514350">
-              <a:buFont typeface="+mj-lt"/>
-              <a:buAutoNum type="arabicPeriod"/>
-            </a:pPr>
-            <a:r>
-              <a:rPr lang="en-US" dirty="0"/>
-              <a:t>Install </a:t>
-            </a:r>
-            <a:r>
-              <a:rPr lang="en-US" dirty="0" err="1"/>
-              <a:t>ComplexHeatmap</a:t>
-            </a:r>
-            <a:r>
-              <a:rPr lang="en-US" dirty="0"/>
-              <a:t> using the following code:</a:t>
-            </a:r>
-          </a:p>
-          <a:p>
-            <a:pPr marL="457200" lvl="1" indent="0">
-              <a:buNone/>
-            </a:pPr>
-            <a:r>
-              <a:rPr lang="en-US" dirty="0">
-                <a:highlight>
-                  <a:srgbClr val="FFFF00"/>
-                </a:highlight>
-              </a:rPr>
-              <a:t>if (!</a:t>
-            </a:r>
-            <a:r>
-              <a:rPr lang="en-US" dirty="0" err="1">
-                <a:highlight>
-                  <a:srgbClr val="FFFF00"/>
-                </a:highlight>
-              </a:rPr>
-              <a:t>requireNamespace</a:t>
-            </a:r>
-            <a:r>
-              <a:rPr lang="en-US" dirty="0">
-                <a:highlight>
-                  <a:srgbClr val="FFFF00"/>
-                </a:highlight>
-              </a:rPr>
-              <a:t>("</a:t>
-            </a:r>
-            <a:r>
-              <a:rPr lang="en-US" dirty="0" err="1">
-                <a:highlight>
-                  <a:srgbClr val="FFFF00"/>
-                </a:highlight>
-              </a:rPr>
-              <a:t>BiocManager</a:t>
-            </a:r>
-            <a:r>
-              <a:rPr lang="en-US" dirty="0">
-                <a:highlight>
-                  <a:srgbClr val="FFFF00"/>
-                </a:highlight>
-              </a:rPr>
-              <a:t>", quietly = TRUE)) </a:t>
-            </a:r>
-            <a:r>
-              <a:rPr lang="en-US" dirty="0" err="1">
-                <a:highlight>
-                  <a:srgbClr val="FFFF00"/>
-                </a:highlight>
-              </a:rPr>
-              <a:t>install.packages</a:t>
-            </a:r>
-            <a:r>
-              <a:rPr lang="en-US" dirty="0">
-                <a:highlight>
-                  <a:srgbClr val="FFFF00"/>
-                </a:highlight>
-              </a:rPr>
-              <a:t>("</a:t>
-            </a:r>
-            <a:r>
-              <a:rPr lang="en-US" dirty="0" err="1">
-                <a:highlight>
-                  <a:srgbClr val="FFFF00"/>
-                </a:highlight>
-              </a:rPr>
-              <a:t>BiocManager</a:t>
-            </a:r>
-            <a:r>
-              <a:rPr lang="en-US" dirty="0">
-                <a:highlight>
-                  <a:srgbClr val="FFFF00"/>
-                </a:highlight>
-              </a:rPr>
-              <a:t>")</a:t>
-            </a:r>
-          </a:p>
-          <a:p>
-            <a:pPr marL="457200" lvl="1" indent="0">
-              <a:buNone/>
-            </a:pPr>
-            <a:r>
-              <a:rPr lang="en-US" dirty="0" err="1">
-                <a:highlight>
-                  <a:srgbClr val="FFFF00"/>
-                </a:highlight>
-              </a:rPr>
-              <a:t>BiocManager</a:t>
-            </a:r>
-            <a:r>
-              <a:rPr lang="en-US" dirty="0">
-                <a:highlight>
-                  <a:srgbClr val="FFFF00"/>
-                </a:highlight>
-              </a:rPr>
-              <a:t>::install(c("</a:t>
-            </a:r>
-            <a:r>
-              <a:rPr lang="en-US" dirty="0" err="1">
-                <a:highlight>
-                  <a:srgbClr val="FFFF00"/>
-                </a:highlight>
-              </a:rPr>
-              <a:t>ComplexHeatmap</a:t>
-            </a:r>
-            <a:r>
-              <a:rPr lang="en-US" dirty="0">
-                <a:highlight>
-                  <a:srgbClr val="FFFF00"/>
-                </a:highlight>
-              </a:rPr>
-              <a:t>”)</a:t>
-            </a:r>
-          </a:p>
-          <a:p>
-            <a:pPr marL="514350" indent="-514350">
-              <a:buFont typeface="+mj-lt"/>
-              <a:buAutoNum type="arabicPeriod"/>
-            </a:pPr>
-            <a:r>
-              <a:rPr lang="en-US" dirty="0"/>
-              <a:t>Open </a:t>
-            </a:r>
-            <a:r>
-              <a:rPr lang="en-US" dirty="0" err="1"/>
-              <a:t>runModac.Rproj</a:t>
-            </a:r>
-            <a:endParaRPr lang="en-US" dirty="0"/>
-          </a:p>
-          <a:p>
-            <a:pPr marL="514350" indent="-514350">
-              <a:buFont typeface="+mj-lt"/>
-              <a:buAutoNum type="arabicPeriod"/>
-            </a:pPr>
-            <a:r>
-              <a:rPr lang="en-US" dirty="0"/>
-              <a:t>Source the “R/</a:t>
-            </a:r>
-            <a:r>
-              <a:rPr lang="en-US" dirty="0" err="1"/>
-              <a:t>runModac.R</a:t>
-            </a:r>
-            <a:r>
-              <a:rPr lang="en-US" dirty="0"/>
-              <a:t>” file and proceed with analysis</a:t>
-            </a:r>
-          </a:p>
-          <a:p>
-            <a:pPr marL="514350" indent="-514350">
-              <a:buFont typeface="+mj-lt"/>
-              <a:buAutoNum type="arabicPeriod"/>
-            </a:pPr>
-            <a:endParaRPr lang="en-US" dirty="0"/>
-          </a:p>
-          <a:p>
-            <a:pPr marL="514350" indent="-514350">
-              <a:buFont typeface="+mj-lt"/>
-              <a:buAutoNum type="arabicPeriod"/>
-            </a:pPr>
-            <a:endParaRPr lang="en-US" dirty="0"/>
-          </a:p>
-        </p:txBody>
-      </p:sp>
-      <p:sp>
-        <p:nvSpPr>
-          <p:cNvPr id="4" name="Title 1">
-            <a:extLst>
-              <a:ext uri="{FF2B5EF4-FFF2-40B4-BE49-F238E27FC236}">
-                <a16:creationId xmlns:a16="http://schemas.microsoft.com/office/drawing/2014/main" id="{1698327C-A5D0-FC32-FF96-831F06359282}"/>
-              </a:ext>
-            </a:extLst>
-          </p:cNvPr>
-          <p:cNvSpPr txBox="1">
-            <a:spLocks/>
-          </p:cNvSpPr>
-          <p:nvPr/>
-        </p:nvSpPr>
-        <p:spPr>
-          <a:xfrm>
-            <a:off x="838200" y="5896"/>
-            <a:ext cx="10515600" cy="962933"/>
-          </a:xfrm>
-          <a:prstGeom prst="rect">
-            <a:avLst/>
-          </a:prstGeom>
-        </p:spPr>
-        <p:txBody>
-          <a:bodyPr vert="horz" lIns="91440" tIns="45720" rIns="91440" bIns="45720" rtlCol="0" anchor="ctr">
-            <a:normAutofit/>
-          </a:bodyPr>
-          <a:lstStyle>
-            <a:lvl1pPr algn="l" defTabSz="914400" rtl="0" eaLnBrk="1" latinLnBrk="0" hangingPunct="1">
-              <a:lnSpc>
-                <a:spcPct val="90000"/>
-              </a:lnSpc>
-              <a:spcBef>
-                <a:spcPct val="0"/>
-              </a:spcBef>
-              <a:buNone/>
-              <a:defRPr sz="4400" kern="1200">
-                <a:solidFill>
-                  <a:schemeClr val="tx1"/>
-                </a:solidFill>
-                <a:latin typeface="+mj-lt"/>
-                <a:ea typeface="+mj-ea"/>
-                <a:cs typeface="+mj-cs"/>
-              </a:defRPr>
-            </a:lvl1pPr>
-          </a:lstStyle>
-          <a:p>
-            <a:pPr algn="ctr"/>
-            <a:r>
-              <a:rPr lang="en-US" dirty="0"/>
-              <a:t>Prep</a:t>
-            </a:r>
-          </a:p>
-        </p:txBody>
-      </p:sp>
-    </p:spTree>
-    <p:extLst>
-      <p:ext uri="{BB962C8B-B14F-4D97-AF65-F5344CB8AC3E}">
-        <p14:creationId xmlns:p14="http://schemas.microsoft.com/office/powerpoint/2010/main" val="2800028702"/>
-      </p:ext>
-    </p:extLst>
-  </p:cSld>
-  <p:clrMapOvr>
-    <a:masterClrMapping/>
-  </p:clrMapOvr>
-</p:sld>
-</file>
-
 <file path=ppt/slides/slide3.xml><?xml version="1.0" encoding="utf-8"?>
 <p:sld xmlns:a="http://schemas.openxmlformats.org/drawingml/2006/main" xmlns:r="http://schemas.openxmlformats.org/officeDocument/2006/relationships" xmlns:p="http://schemas.openxmlformats.org/presentationml/2006/main">
   <p:cSld>
@@ -5421,7 +6739,7 @@
         </p:spPr>
         <p:txBody>
           <a:bodyPr>
-            <a:normAutofit lnSpcReduction="10000"/>
+            <a:normAutofit fontScale="85000" lnSpcReduction="20000"/>
           </a:bodyPr>
           <a:lstStyle/>
           <a:p>
@@ -5532,11 +6850,11 @@
             </a:r>
             <a:r>
               <a:rPr lang="en-US" dirty="0" err="1"/>
-              <a:t>samplesAreRows</a:t>
-            </a:r>
-            <a:r>
-              <a:rPr lang="en-US" dirty="0"/>
-              <a:t> = T,</a:t>
+              <a:t>heatmap_color_scale</a:t>
+            </a:r>
+            <a:r>
+              <a:rPr lang="en-US" dirty="0"/>
+              <a:t> = c("blue", "black", "yellow"),</a:t>
             </a:r>
           </a:p>
           <a:p>
@@ -5549,11 +6867,45 @@
             </a:r>
             <a:r>
               <a:rPr lang="en-US" dirty="0" err="1"/>
+              <a:t>samplesAreRows</a:t>
+            </a:r>
+            <a:r>
+              <a:rPr lang="en-US" dirty="0"/>
+              <a:t> = T,</a:t>
+            </a:r>
+          </a:p>
+          <a:p>
+            <a:pPr marL="0" indent="0">
+              <a:buNone/>
+            </a:pPr>
+            <a:r>
+              <a:rPr lang="en-US" dirty="0"/>
+              <a:t>		</a:t>
+            </a:r>
+            <a:r>
+              <a:rPr lang="en-US" dirty="0" err="1"/>
               <a:t>sampleIDRow</a:t>
             </a:r>
             <a:r>
               <a:rPr lang="en-US" dirty="0"/>
               <a:t> = 2,</a:t>
+            </a:r>
+          </a:p>
+          <a:p>
+            <a:pPr marL="0" indent="0">
+              <a:buNone/>
+            </a:pPr>
+            <a:r>
+              <a:rPr lang="en-US" dirty="0"/>
+              <a:t>		</a:t>
+            </a:r>
+            <a:r>
+              <a:rPr lang="en-US" dirty="0" err="1"/>
+              <a:t>min_signal</a:t>
+            </a:r>
+            <a:r>
+              <a:rPr lang="en-US" dirty="0"/>
+              <a:t> = NULL,</a:t>
             </a:r>
           </a:p>
           <a:p>
@@ -5902,7 +7254,7 @@
             </a:pPr>
             <a:r>
               <a:rPr lang="en-US" dirty="0"/>
-              <a:t>No NAs or blank cells</a:t>
+              <a:t>Any NAs or blank cells will be replaced by 1</a:t>
             </a:r>
           </a:p>
           <a:p>
@@ -5996,7 +7348,7 @@
         <p:spPr>
           <a:xfrm>
             <a:off x="5564910" y="968829"/>
-            <a:ext cx="6627089" cy="5909310"/>
+            <a:ext cx="6627089" cy="5755422"/>
           </a:xfrm>
           <a:prstGeom prst="rect">
             <a:avLst/>
@@ -6014,27 +7366,27 @@
               <a:buChar char="•"/>
             </a:pPr>
             <a:r>
-              <a:rPr lang="en-US" b="1" dirty="0" err="1"/>
+              <a:rPr lang="en-US" sz="1600" b="1" dirty="0" err="1"/>
               <a:t>padj_method</a:t>
             </a:r>
             <a:r>
-              <a:rPr lang="en-US" dirty="0"/>
+              <a:rPr lang="en-US" sz="1600" dirty="0"/>
               <a:t>: “</a:t>
             </a:r>
             <a:r>
-              <a:rPr lang="en-US" dirty="0" err="1"/>
+              <a:rPr lang="en-US" sz="1600" dirty="0" err="1"/>
               <a:t>pval</a:t>
             </a:r>
             <a:r>
-              <a:rPr lang="en-US" dirty="0"/>
+              <a:rPr lang="en-US" sz="1600" dirty="0"/>
               <a:t>” or “</a:t>
             </a:r>
             <a:r>
-              <a:rPr lang="en-US" dirty="0" err="1"/>
+              <a:rPr lang="en-US" sz="1600" dirty="0" err="1"/>
               <a:t>fdr</a:t>
             </a:r>
             <a:r>
-              <a:rPr lang="en-US" dirty="0"/>
+              <a:rPr lang="en-US" sz="1600" dirty="0"/>
               <a:t>”. Use p-value or FDR for generating filtered heatmaps and signature files?</a:t>
             </a:r>
           </a:p>
@@ -6044,11 +7396,11 @@
               <a:buChar char="•"/>
             </a:pPr>
             <a:r>
-              <a:rPr lang="en-US" b="1" dirty="0" err="1"/>
+              <a:rPr lang="en-US" sz="1600" b="1" dirty="0" err="1"/>
               <a:t>padj_cutoff</a:t>
             </a:r>
             <a:r>
-              <a:rPr lang="en-US" dirty="0"/>
+              <a:rPr lang="en-US" sz="1600" dirty="0"/>
               <a:t>: p-value or FDR threshold for generating filtered heatmaps and signature files.</a:t>
             </a:r>
           </a:p>
@@ -6058,25 +7410,25 @@
               <a:buChar char="•"/>
             </a:pPr>
             <a:r>
-              <a:rPr lang="en-US" b="1" dirty="0" err="1"/>
-              <a:t>fc_type</a:t>
-            </a:r>
-            <a:r>
-              <a:rPr lang="en-US" dirty="0"/>
-              <a:t>: “linear” or “log2”. Calculate linear fold change or log2 fold change?</a:t>
-            </a:r>
-          </a:p>
-          <a:p>
-            <a:pPr marL="285750" indent="-285750">
-              <a:buFont typeface="Arial" panose="020B0604020202020204" pitchFamily="34" charset="0"/>
-              <a:buChar char="•"/>
-            </a:pPr>
-            <a:r>
-              <a:rPr lang="en-US" b="1" dirty="0" err="1"/>
+              <a:rPr lang="en-US" sz="1600" b="1" dirty="0"/>
+              <a:t>compute_log2fc</a:t>
+            </a:r>
+            <a:r>
+              <a:rPr lang="en-US" sz="1600" dirty="0"/>
+              <a:t>: TRUE or FALSE. Calculate log2 and linear fold change or only linear fold change?</a:t>
+            </a:r>
+          </a:p>
+          <a:p>
+            <a:pPr marL="285750" indent="-285750">
+              <a:buFont typeface="Arial" panose="020B0604020202020204" pitchFamily="34" charset="0"/>
+              <a:buChar char="•"/>
+            </a:pPr>
+            <a:r>
+              <a:rPr lang="en-US" sz="1600" b="1" dirty="0" err="1"/>
               <a:t>linear_fc_cutoff</a:t>
             </a:r>
             <a:r>
-              <a:rPr lang="en-US" dirty="0"/>
+              <a:rPr lang="en-US" sz="1600" dirty="0"/>
               <a:t>: Fold change threshold for generating signature files.</a:t>
             </a:r>
           </a:p>
@@ -6086,11 +7438,11 @@
               <a:buChar char="•"/>
             </a:pPr>
             <a:r>
-              <a:rPr lang="en-US" b="1" dirty="0" err="1"/>
+              <a:rPr lang="en-US" sz="1600" b="1" dirty="0" err="1"/>
               <a:t>QC_row</a:t>
             </a:r>
             <a:r>
-              <a:rPr lang="en-US" dirty="0"/>
+              <a:rPr lang="en-US" sz="1600" dirty="0"/>
               <a:t>: row index for the first QC sample.</a:t>
             </a:r>
           </a:p>
@@ -6100,11 +7452,11 @@
               <a:buChar char="•"/>
             </a:pPr>
             <a:r>
-              <a:rPr lang="en-US" b="1" dirty="0" err="1"/>
+              <a:rPr lang="en-US" sz="1600" b="1" dirty="0" err="1"/>
               <a:t>cv_cutoff_internal_standard</a:t>
             </a:r>
             <a:r>
-              <a:rPr lang="en-US" dirty="0"/>
+              <a:rPr lang="en-US" sz="1600" dirty="0"/>
               <a:t>: Coefficient of variation (CV) threshold for internal standard (ISTD). Only ISTDs with CV lower than this threshold will be considered for normalization.</a:t>
             </a:r>
           </a:p>
@@ -6114,27 +7466,27 @@
               <a:buChar char="•"/>
             </a:pPr>
             <a:r>
-              <a:rPr lang="en-US" b="1" dirty="0"/>
+              <a:rPr lang="en-US" sz="1600" b="1" dirty="0"/>
               <a:t>normalization</a:t>
             </a:r>
             <a:r>
-              <a:rPr lang="en-US" dirty="0"/>
+              <a:rPr lang="en-US" sz="1600" dirty="0"/>
               <a:t>: “</a:t>
             </a:r>
             <a:r>
-              <a:rPr lang="en-US" dirty="0" err="1"/>
+              <a:rPr lang="en-US" sz="1600" dirty="0" err="1"/>
               <a:t>istd</a:t>
             </a:r>
             <a:r>
-              <a:rPr lang="en-US" dirty="0"/>
+              <a:rPr lang="en-US" sz="1600" dirty="0"/>
               <a:t>”, “</a:t>
             </a:r>
             <a:r>
-              <a:rPr lang="en-US" dirty="0" err="1"/>
+              <a:rPr lang="en-US" sz="1600" dirty="0" err="1"/>
               <a:t>iqr</a:t>
             </a:r>
             <a:r>
-              <a:rPr lang="en-US" dirty="0"/>
+              <a:rPr lang="en-US" sz="1600" dirty="0"/>
               <a:t>”, or “none”. Type of normalization to be performed – internal standard, interquartile range, or none?</a:t>
             </a:r>
           </a:p>
@@ -6144,25 +7496,40 @@
               <a:buChar char="•"/>
             </a:pPr>
             <a:r>
-              <a:rPr lang="en-US" b="1" dirty="0"/>
-              <a:t>log2transform</a:t>
-            </a:r>
-            <a:r>
-              <a:rPr lang="en-US" dirty="0"/>
-              <a:t>: Apply log2 transformation?</a:t>
-            </a:r>
-          </a:p>
-          <a:p>
-            <a:pPr marL="285750" indent="-285750">
-              <a:buFont typeface="Arial" panose="020B0604020202020204" pitchFamily="34" charset="0"/>
-              <a:buChar char="•"/>
-            </a:pPr>
-            <a:r>
-              <a:rPr lang="en-US" b="1" dirty="0"/>
+              <a:rPr lang="en-US" sz="1600" b="1" dirty="0" err="1"/>
+              <a:t>input_data_space</a:t>
+            </a:r>
+            <a:r>
+              <a:rPr lang="en-US" sz="1600" dirty="0"/>
+              <a:t>: “linear” or “log2”. Input data is in linear space or log2 space?</a:t>
+            </a:r>
+          </a:p>
+          <a:p>
+            <a:pPr marL="285750" indent="-285750">
+              <a:buFont typeface="Arial" panose="020B0604020202020204" pitchFamily="34" charset="0"/>
+              <a:buChar char="•"/>
+            </a:pPr>
+            <a:r>
+              <a:rPr lang="en-US" sz="1600" b="1" dirty="0" err="1"/>
+              <a:t>differential_analysis_space</a:t>
+            </a:r>
+            <a:r>
+              <a:rPr lang="en-US" sz="1600" dirty="0"/>
+              <a:t>: “linear” or “log2”. For differential analysis, transform the data to linear or log2 space?</a:t>
+            </a:r>
+            <a:endParaRPr lang="en-US" sz="1600" b="1" dirty="0"/>
+          </a:p>
+          <a:p>
+            <a:pPr marL="285750" indent="-285750">
+              <a:buFont typeface="Arial" panose="020B0604020202020204" pitchFamily="34" charset="0"/>
+              <a:buChar char="•"/>
+            </a:pPr>
+            <a:r>
+              <a:rPr lang="en-US" sz="1600" b="1" dirty="0"/>
               <a:t>tab</a:t>
             </a:r>
             <a:r>
-              <a:rPr lang="en-US" dirty="0"/>
+              <a:rPr lang="en-US" sz="1600" dirty="0"/>
               <a:t>: For ISTD normalization, write down names of all the methods below this. For any other normalization, leave blank.</a:t>
             </a:r>
           </a:p>
@@ -6172,11 +7539,11 @@
               <a:buChar char="•"/>
             </a:pPr>
             <a:r>
-              <a:rPr lang="en-US" b="1" dirty="0" err="1"/>
+              <a:rPr lang="en-US" sz="1600" b="1" dirty="0" err="1"/>
               <a:t>ISTD_column</a:t>
             </a:r>
             <a:r>
-              <a:rPr lang="en-US" dirty="0"/>
+              <a:rPr lang="en-US" sz="1600" dirty="0"/>
               <a:t>: For ISTD normalization, write down index of the first (or only) internal standard methods below this for all the methods. For any other normalization, leave blank.</a:t>
             </a:r>
           </a:p>
@@ -6185,16 +7552,16 @@
               <a:buFont typeface="Arial" panose="020B0604020202020204" pitchFamily="34" charset="0"/>
               <a:buChar char="•"/>
             </a:pPr>
-            <a:endParaRPr lang="en-US" b="1" u="sng" dirty="0"/>
+            <a:endParaRPr lang="en-US" sz="1600" b="1" u="sng" dirty="0"/>
           </a:p>
         </p:txBody>
       </p:sp>
       <p:pic>
         <p:nvPicPr>
-          <p:cNvPr id="6" name="Picture 5">
-            <a:extLst>
-              <a:ext uri="{FF2B5EF4-FFF2-40B4-BE49-F238E27FC236}">
-                <a16:creationId xmlns:a16="http://schemas.microsoft.com/office/drawing/2014/main" id="{4574C730-E459-1246-2E53-0B0DF84AEABD}"/>
+          <p:cNvPr id="8" name="Picture 7">
+            <a:extLst>
+              <a:ext uri="{FF2B5EF4-FFF2-40B4-BE49-F238E27FC236}">
+                <a16:creationId xmlns:a16="http://schemas.microsoft.com/office/drawing/2014/main" id="{AD833922-81E0-E2FA-97E9-0CAECF3167D1}"/>
               </a:ext>
             </a:extLst>
           </p:cNvPr>
@@ -6211,8 +7578,8 @@
         </p:blipFill>
         <p:spPr>
           <a:xfrm>
-            <a:off x="0" y="1367382"/>
-            <a:ext cx="4961211" cy="5112204"/>
+            <a:off x="0" y="920478"/>
+            <a:ext cx="5514095" cy="5852124"/>
           </a:xfrm>
           <a:prstGeom prst="rect">
             <a:avLst/>
@@ -6512,10 +7879,10 @@
       </p:sp>
       <p:pic>
         <p:nvPicPr>
-          <p:cNvPr id="4" name="Picture 3">
-            <a:extLst>
-              <a:ext uri="{FF2B5EF4-FFF2-40B4-BE49-F238E27FC236}">
-                <a16:creationId xmlns:a16="http://schemas.microsoft.com/office/drawing/2014/main" id="{3E2E01DC-4B9F-6D37-F466-5AA4E5A41F84}"/>
+          <p:cNvPr id="5" name="Picture 4">
+            <a:extLst>
+              <a:ext uri="{FF2B5EF4-FFF2-40B4-BE49-F238E27FC236}">
+                <a16:creationId xmlns:a16="http://schemas.microsoft.com/office/drawing/2014/main" id="{FAEFA073-845D-D2CF-05DF-DA57417BF94A}"/>
               </a:ext>
             </a:extLst>
           </p:cNvPr>
@@ -6532,8 +7899,8 @@
         </p:blipFill>
         <p:spPr>
           <a:xfrm>
-            <a:off x="1" y="3042247"/>
-            <a:ext cx="7010400" cy="1533922"/>
+            <a:off x="0" y="2904907"/>
+            <a:ext cx="5657852" cy="2025910"/>
           </a:xfrm>
           <a:prstGeom prst="rect">
             <a:avLst/>
@@ -6542,10 +7909,10 @@
       </p:pic>
       <p:sp>
         <p:nvSpPr>
-          <p:cNvPr id="12" name="TextBox 11">
-            <a:extLst>
-              <a:ext uri="{FF2B5EF4-FFF2-40B4-BE49-F238E27FC236}">
-                <a16:creationId xmlns:a16="http://schemas.microsoft.com/office/drawing/2014/main" id="{0DF7F6F9-9252-948A-C4A1-795026BE8DAD}"/>
+          <p:cNvPr id="6" name="TextBox 5">
+            <a:extLst>
+              <a:ext uri="{FF2B5EF4-FFF2-40B4-BE49-F238E27FC236}">
+                <a16:creationId xmlns:a16="http://schemas.microsoft.com/office/drawing/2014/main" id="{B6A41D65-FF17-6810-78AA-EEC0F79FA711}"/>
               </a:ext>
             </a:extLst>
           </p:cNvPr>
@@ -6554,8 +7921,8 @@
         </p:nvSpPr>
         <p:spPr>
           <a:xfrm>
-            <a:off x="7010401" y="2236704"/>
-            <a:ext cx="5323112" cy="3139321"/>
+            <a:off x="5660020" y="968829"/>
+            <a:ext cx="6531980" cy="5909310"/>
           </a:xfrm>
           <a:prstGeom prst="rect">
             <a:avLst/>
@@ -6639,7 +8006,7 @@
             </a:r>
             <a:r>
               <a:rPr lang="en-US" dirty="0"/>
-              <a:t>: path to output directory.</a:t>
+              <a:t>: path to output directory. Default is “results” folder in current directory.</a:t>
             </a:r>
             <a:endParaRPr lang="en-US" b="1" dirty="0"/>
           </a:p>
@@ -6654,7 +8021,7 @@
             </a:r>
             <a:r>
               <a:rPr lang="en-US" dirty="0"/>
-              <a:t>: project title to be used in the summary pptx.</a:t>
+              <a:t>: project title to be used in the summary pptx. Default is “Report”.</a:t>
             </a:r>
             <a:endParaRPr lang="en-US" b="1" dirty="0"/>
           </a:p>
@@ -6669,7 +8036,95 @@
             </a:r>
             <a:r>
               <a:rPr lang="en-US" dirty="0"/>
-              <a:t>: project subtitle to be used in the summary pptx.</a:t>
+              <a:t>: project subtitle to be used in the summary pptx. Default is “by”.</a:t>
+            </a:r>
+          </a:p>
+          <a:p>
+            <a:pPr marL="285750" indent="-285750">
+              <a:buFont typeface="Arial" panose="020B0604020202020204" pitchFamily="34" charset="0"/>
+              <a:buChar char="•"/>
+            </a:pPr>
+            <a:r>
+              <a:rPr lang="en-US" b="1" dirty="0" err="1"/>
+              <a:t>heatmap_color_scale</a:t>
+            </a:r>
+            <a:r>
+              <a:rPr lang="en-US" b="1" dirty="0"/>
+              <a:t>: </a:t>
+            </a:r>
+            <a:r>
+              <a:rPr lang="en-US" dirty="0"/>
+              <a:t>specify 3 colors to use for heatmap color scale. Default is c("blue", "black", "yellow").</a:t>
+            </a:r>
+          </a:p>
+          <a:p>
+            <a:pPr marL="285750" indent="-285750">
+              <a:buFont typeface="Arial" panose="020B0604020202020204" pitchFamily="34" charset="0"/>
+              <a:buChar char="•"/>
+            </a:pPr>
+            <a:r>
+              <a:rPr lang="en-US" b="1" dirty="0" err="1"/>
+              <a:t>samplesAreRows</a:t>
+            </a:r>
+            <a:r>
+              <a:rPr lang="en-US" b="1" dirty="0"/>
+              <a:t>: </a:t>
+            </a:r>
+            <a:r>
+              <a:rPr lang="en-US" dirty="0"/>
+              <a:t>TRUE or FALSE. Is the input data in the form of rows of samples? Default is TRUE.</a:t>
+            </a:r>
+          </a:p>
+          <a:p>
+            <a:pPr marL="285750" indent="-285750">
+              <a:buFont typeface="Arial" panose="020B0604020202020204" pitchFamily="34" charset="0"/>
+              <a:buChar char="•"/>
+            </a:pPr>
+            <a:r>
+              <a:rPr lang="en-US" b="1" dirty="0" err="1"/>
+              <a:t>sampleIDRow</a:t>
+            </a:r>
+            <a:r>
+              <a:rPr lang="en-US" b="1" dirty="0"/>
+              <a:t>: </a:t>
+            </a:r>
+            <a:r>
+              <a:rPr lang="en-US" dirty="0"/>
+              <a:t>1 or 2.</a:t>
+            </a:r>
+            <a:r>
+              <a:rPr lang="en-US" b="1" dirty="0"/>
+              <a:t> </a:t>
+            </a:r>
+            <a:r>
+              <a:rPr lang="en-US" dirty="0"/>
+              <a:t>Only for RPPA analysis. Which row of the normalized RPPA data are the Sample IDs present in? Default is 2.</a:t>
+            </a:r>
+          </a:p>
+          <a:p>
+            <a:pPr marL="285750" indent="-285750">
+              <a:buFont typeface="Arial" panose="020B0604020202020204" pitchFamily="34" charset="0"/>
+              <a:buChar char="•"/>
+            </a:pPr>
+            <a:r>
+              <a:rPr lang="en-US" b="1" dirty="0" err="1"/>
+              <a:t>min_signal</a:t>
+            </a:r>
+            <a:r>
+              <a:rPr lang="en-US" b="1" dirty="0"/>
+              <a:t>: </a:t>
+            </a:r>
+            <a:r>
+              <a:rPr lang="en-US" dirty="0"/>
+              <a:t>for each comparison, filtering out features for which none of the samples have signal &gt; </a:t>
+            </a:r>
+            <a:r>
+              <a:rPr lang="en-US" dirty="0" err="1"/>
+              <a:t>min_signal</a:t>
+            </a:r>
+            <a:r>
+              <a:rPr lang="en-US" dirty="0"/>
+              <a:t>. Setting to NULL turns this filter off. Default is NULL.</a:t>
             </a:r>
             <a:endParaRPr lang="en-US" b="1" dirty="0"/>
           </a:p>
@@ -6777,7 +8232,7 @@
         <p:spPr>
           <a:xfrm>
             <a:off x="3668486" y="1720840"/>
-            <a:ext cx="8523514" cy="4524315"/>
+            <a:ext cx="8523514" cy="4247317"/>
           </a:xfrm>
           <a:prstGeom prst="rect">
             <a:avLst/>
@@ -6874,12 +8329,6 @@
               <a:rPr lang="en-US" dirty="0"/>
               <a:t>: presentation containing a summary of the results.</a:t>
             </a:r>
-          </a:p>
-          <a:p>
-            <a:pPr marL="285750" indent="-285750">
-              <a:buFont typeface="Arial" panose="020B0604020202020204" pitchFamily="34" charset="0"/>
-              <a:buChar char="•"/>
-            </a:pPr>
             <a:endParaRPr lang="en-US" b="1" dirty="0"/>
           </a:p>
           <a:p>
@@ -6902,13 +8351,6 @@
               <a:buFont typeface="Arial" panose="020B0604020202020204" pitchFamily="34" charset="0"/>
               <a:buChar char="•"/>
             </a:pPr>
-            <a:endParaRPr lang="en-US" b="1" dirty="0"/>
-          </a:p>
-          <a:p>
-            <a:pPr marL="285750" indent="-285750">
-              <a:buFont typeface="Arial" panose="020B0604020202020204" pitchFamily="34" charset="0"/>
-              <a:buChar char="•"/>
-            </a:pPr>
             <a:r>
               <a:rPr lang="en-US" b="1" dirty="0" err="1"/>
               <a:t>sessionInfo.txt</a:t>
@@ -6928,13 +8370,6 @@
               <a:buFont typeface="Arial" panose="020B0604020202020204" pitchFamily="34" charset="0"/>
               <a:buChar char="•"/>
             </a:pPr>
-            <a:endParaRPr lang="en-US" b="1" dirty="0"/>
-          </a:p>
-          <a:p>
-            <a:pPr marL="285750" indent="-285750">
-              <a:buFont typeface="Arial" panose="020B0604020202020204" pitchFamily="34" charset="0"/>
-              <a:buChar char="•"/>
-            </a:pPr>
             <a:r>
               <a:rPr lang="en-US" b="1" dirty="0"/>
               <a:t>Signature</a:t>
@@ -6943,16 +8378,34 @@
               <a:rPr lang="en-US" dirty="0"/>
               <a:t>: folder containing the signature files for each comparison.</a:t>
             </a:r>
+          </a:p>
+          <a:p>
+            <a:pPr marL="285750" indent="-285750">
+              <a:buFont typeface="Arial" panose="020B0604020202020204" pitchFamily="34" charset="0"/>
+              <a:buChar char="•"/>
+            </a:pPr>
+            <a:r>
+              <a:rPr lang="en-US" b="1" dirty="0" err="1"/>
+              <a:t>volcano_plots</a:t>
+            </a:r>
+            <a:r>
+              <a:rPr lang="en-US" b="1" dirty="0"/>
+              <a:t>: </a:t>
+            </a:r>
+            <a:r>
+              <a:rPr lang="en-US" dirty="0"/>
+              <a:t>folder containing volcano plots for each t-test comparison in .jpg and .pdf format.</a:t>
+            </a:r>
             <a:endParaRPr lang="en-US" b="1" dirty="0"/>
           </a:p>
         </p:txBody>
       </p:sp>
       <p:pic>
         <p:nvPicPr>
-          <p:cNvPr id="4" name="Picture 3">
-            <a:extLst>
-              <a:ext uri="{FF2B5EF4-FFF2-40B4-BE49-F238E27FC236}">
-                <a16:creationId xmlns:a16="http://schemas.microsoft.com/office/drawing/2014/main" id="{DB62728E-B5C4-B234-2739-E369C25BFE81}"/>
+          <p:cNvPr id="7" name="Picture 6">
+            <a:extLst>
+              <a:ext uri="{FF2B5EF4-FFF2-40B4-BE49-F238E27FC236}">
+                <a16:creationId xmlns:a16="http://schemas.microsoft.com/office/drawing/2014/main" id="{C023E7C6-CFF0-B739-2E6E-6AF780202D81}"/>
               </a:ext>
             </a:extLst>
           </p:cNvPr>
@@ -6961,16 +8414,15 @@
           </p:cNvPicPr>
           <p:nvPr/>
         </p:nvPicPr>
-        <p:blipFill>
+        <p:blipFill rotWithShape="1">
           <a:blip r:embed="rId2"/>
-          <a:stretch>
-            <a:fillRect/>
-          </a:stretch>
+          <a:srcRect t="9416"/>
+          <a:stretch/>
         </p:blipFill>
         <p:spPr>
           <a:xfrm>
-            <a:off x="0" y="1134237"/>
-            <a:ext cx="3569918" cy="5281117"/>
+            <a:off x="0" y="1616371"/>
+            <a:ext cx="3665008" cy="4456254"/>
           </a:xfrm>
           <a:prstGeom prst="rect">
             <a:avLst/>

--- a/Readme/IntroToModac.pptx
+++ b/Readme/IntroToModac.pptx
@@ -280,7 +280,7 @@
           <a:p>
             <a:fld id="{FA812CF8-5571-2F43-B531-95039EEE283D}" type="datetimeFigureOut">
               <a:rPr lang="en-US" smtClean="0"/>
-              <a:t>10/1/23</a:t>
+              <a:t>6/25/24</a:t>
             </a:fld>
             <a:endParaRPr lang="en-US"/>
           </a:p>
@@ -478,7 +478,7 @@
           <a:p>
             <a:fld id="{FA812CF8-5571-2F43-B531-95039EEE283D}" type="datetimeFigureOut">
               <a:rPr lang="en-US" smtClean="0"/>
-              <a:t>10/1/23</a:t>
+              <a:t>6/25/24</a:t>
             </a:fld>
             <a:endParaRPr lang="en-US"/>
           </a:p>
@@ -686,7 +686,7 @@
           <a:p>
             <a:fld id="{FA812CF8-5571-2F43-B531-95039EEE283D}" type="datetimeFigureOut">
               <a:rPr lang="en-US" smtClean="0"/>
-              <a:t>10/1/23</a:t>
+              <a:t>6/25/24</a:t>
             </a:fld>
             <a:endParaRPr lang="en-US"/>
           </a:p>
@@ -884,7 +884,7 @@
           <a:p>
             <a:fld id="{FA812CF8-5571-2F43-B531-95039EEE283D}" type="datetimeFigureOut">
               <a:rPr lang="en-US" smtClean="0"/>
-              <a:t>10/1/23</a:t>
+              <a:t>6/25/24</a:t>
             </a:fld>
             <a:endParaRPr lang="en-US"/>
           </a:p>
@@ -1159,7 +1159,7 @@
           <a:p>
             <a:fld id="{FA812CF8-5571-2F43-B531-95039EEE283D}" type="datetimeFigureOut">
               <a:rPr lang="en-US" smtClean="0"/>
-              <a:t>10/1/23</a:t>
+              <a:t>6/25/24</a:t>
             </a:fld>
             <a:endParaRPr lang="en-US"/>
           </a:p>
@@ -1424,7 +1424,7 @@
           <a:p>
             <a:fld id="{FA812CF8-5571-2F43-B531-95039EEE283D}" type="datetimeFigureOut">
               <a:rPr lang="en-US" smtClean="0"/>
-              <a:t>10/1/23</a:t>
+              <a:t>6/25/24</a:t>
             </a:fld>
             <a:endParaRPr lang="en-US"/>
           </a:p>
@@ -1836,7 +1836,7 @@
           <a:p>
             <a:fld id="{FA812CF8-5571-2F43-B531-95039EEE283D}" type="datetimeFigureOut">
               <a:rPr lang="en-US" smtClean="0"/>
-              <a:t>10/1/23</a:t>
+              <a:t>6/25/24</a:t>
             </a:fld>
             <a:endParaRPr lang="en-US"/>
           </a:p>
@@ -1977,7 +1977,7 @@
           <a:p>
             <a:fld id="{FA812CF8-5571-2F43-B531-95039EEE283D}" type="datetimeFigureOut">
               <a:rPr lang="en-US" smtClean="0"/>
-              <a:t>10/1/23</a:t>
+              <a:t>6/25/24</a:t>
             </a:fld>
             <a:endParaRPr lang="en-US"/>
           </a:p>
@@ -2090,7 +2090,7 @@
           <a:p>
             <a:fld id="{FA812CF8-5571-2F43-B531-95039EEE283D}" type="datetimeFigureOut">
               <a:rPr lang="en-US" smtClean="0"/>
-              <a:t>10/1/23</a:t>
+              <a:t>6/25/24</a:t>
             </a:fld>
             <a:endParaRPr lang="en-US"/>
           </a:p>
@@ -2401,7 +2401,7 @@
           <a:p>
             <a:fld id="{FA812CF8-5571-2F43-B531-95039EEE283D}" type="datetimeFigureOut">
               <a:rPr lang="en-US" smtClean="0"/>
-              <a:t>10/1/23</a:t>
+              <a:t>6/25/24</a:t>
             </a:fld>
             <a:endParaRPr lang="en-US"/>
           </a:p>
@@ -2689,7 +2689,7 @@
           <a:p>
             <a:fld id="{FA812CF8-5571-2F43-B531-95039EEE283D}" type="datetimeFigureOut">
               <a:rPr lang="en-US" smtClean="0"/>
-              <a:t>10/1/23</a:t>
+              <a:t>6/25/24</a:t>
             </a:fld>
             <a:endParaRPr lang="en-US"/>
           </a:p>
@@ -2930,7 +2930,7 @@
           <a:p>
             <a:fld id="{FA812CF8-5571-2F43-B531-95039EEE283D}" type="datetimeFigureOut">
               <a:rPr lang="en-US" smtClean="0"/>
-              <a:t>10/1/23</a:t>
+              <a:t>6/25/24</a:t>
             </a:fld>
             <a:endParaRPr lang="en-US"/>
           </a:p>
@@ -5656,6 +5656,21 @@
             </a:pPr>
             <a:r>
               <a:rPr lang="en-US" dirty="0"/>
+              <a:t>Open </a:t>
+            </a:r>
+            <a:r>
+              <a:rPr lang="en-US" dirty="0" err="1"/>
+              <a:t>runModac.Rproj</a:t>
+            </a:r>
+            <a:endParaRPr lang="en-US" dirty="0"/>
+          </a:p>
+          <a:p>
+            <a:pPr marL="514350" indent="-514350">
+              <a:buFont typeface="+mj-lt"/>
+              <a:buAutoNum type="arabicPeriod"/>
+            </a:pPr>
+            <a:r>
+              <a:rPr lang="en-US" dirty="0"/>
               <a:t>Install </a:t>
             </a:r>
             <a:r>
@@ -5778,7 +5793,7 @@
                   <a:srgbClr val="FFFF00"/>
                 </a:highlight>
               </a:rPr>
-              <a:t>”)</a:t>
+              <a:t>")) </a:t>
             </a:r>
           </a:p>
           <a:p>
@@ -5788,13 +5803,16 @@
             </a:pPr>
             <a:r>
               <a:rPr lang="en-US" dirty="0"/>
-              <a:t>Open </a:t>
+              <a:t>Source the “R/</a:t>
             </a:r>
             <a:r>
               <a:rPr lang="en-US" dirty="0" err="1"/>
-              <a:t>runModac.Rproj</a:t>
-            </a:r>
-            <a:endParaRPr lang="en-US" dirty="0"/>
+              <a:t>runModac.R</a:t>
+            </a:r>
+            <a:r>
+              <a:rPr lang="en-US" dirty="0"/>
+              <a:t>” file</a:t>
+            </a:r>
           </a:p>
           <a:p>
             <a:pPr marL="514350" indent="-514350">
@@ -5803,22 +5821,20 @@
             </a:pPr>
             <a:r>
               <a:rPr lang="en-US" dirty="0"/>
-              <a:t>Source the “R/</a:t>
+              <a:t>Set up and run the </a:t>
             </a:r>
             <a:r>
               <a:rPr lang="en-US" dirty="0" err="1"/>
-              <a:t>runModac.R</a:t>
-            </a:r>
-            <a:r>
-              <a:rPr lang="en-US" dirty="0"/>
-              <a:t>” file and proceed with analysis</a:t>
-            </a:r>
-          </a:p>
-          <a:p>
-            <a:pPr marL="514350" indent="-514350">
-              <a:buFont typeface="+mj-lt"/>
-              <a:buAutoNum type="arabicPeriod"/>
-            </a:pPr>
+              <a:t>runModac</a:t>
+            </a:r>
+            <a:r>
+              <a:rPr lang="en-US" dirty="0"/>
+              <a:t> function for </a:t>
+            </a:r>
+            <a:r>
+              <a:rPr lang="en-US"/>
+              <a:t>your analysis</a:t>
+            </a:r>
             <a:endParaRPr lang="en-US" dirty="0"/>
           </a:p>
           <a:p>
